--- a/slides/bao-ve-do-an.pptx
+++ b/slides/bao-ve-do-an.pptx
@@ -6854,7 +6854,7 @@
               </a:defRPr>
             </a:pPr>
             <a:r>
-              <a:t>KẾT QUẢ PLATE DETECTION &amp; OCR BASELINE</a:t>
+              <a:t>4. ĐÁNH GIÁ OCR — TRƯỚC VÀ SAU FINE-TUNE</a:t>
             </a:r>
           </a:p>
         </p:txBody>
@@ -6868,7 +6868,7 @@
         <p:spPr>
           <a:xfrm>
             <a:off x="548640" y="1188720"/>
-            <a:ext cx="5486400" cy="457200"/>
+            <a:ext cx="10972800" cy="457200"/>
           </a:xfrm>
           <a:prstGeom prst="rect">
             <a:avLst/>
@@ -6882,102 +6882,30 @@
           <a:lstStyle/>
           <a:p>
             <a:pPr algn="l">
-              <a:defRPr sz="2000" b="1">
-                <a:solidFill>
-                  <a:srgbClr val="003366"/>
-                </a:solidFill>
-                <a:latin typeface="Calibri"/>
-              </a:defRPr>
-            </a:pPr>
-            <a:r>
-              <a:t>Plate Detection (20 ảnh):</a:t>
-            </a:r>
-          </a:p>
-        </p:txBody>
-      </p:sp>
-      <p:sp>
-        <p:nvSpPr>
-          <p:cNvPr id="4" name="TextBox 3"/>
-          <p:cNvSpPr txBox="1"/>
-          <p:nvPr/>
-        </p:nvSpPr>
-        <p:spPr>
-          <a:xfrm>
-            <a:off x="548640" y="1737360"/>
-            <a:ext cx="5486400" cy="457200"/>
-          </a:xfrm>
-          <a:prstGeom prst="rect">
-            <a:avLst/>
-          </a:prstGeom>
-          <a:noFill/>
-        </p:spPr>
-        <p:txBody>
-          <a:bodyPr wrap="square">
-            <a:spAutoFit/>
-          </a:bodyPr>
-          <a:lstStyle/>
-          <a:p>
-            <a:pPr algn="l">
               <a:defRPr sz="1800" b="0">
                 <a:solidFill>
-                  <a:srgbClr val="202020"/>
-                </a:solidFill>
-                <a:latin typeface="Calibri"/>
-              </a:defRPr>
-            </a:pPr>
-            <a:r>
-              <a:t>100% detection rate — cả 2 model đều detect đúng</a:t>
-            </a:r>
-          </a:p>
-        </p:txBody>
-      </p:sp>
-      <p:sp>
-        <p:nvSpPr>
-          <p:cNvPr id="5" name="TextBox 4"/>
-          <p:cNvSpPr txBox="1"/>
-          <p:nvPr/>
-        </p:nvSpPr>
-        <p:spPr>
-          <a:xfrm>
-            <a:off x="548640" y="2377440"/>
-            <a:ext cx="5486400" cy="457200"/>
-          </a:xfrm>
-          <a:prstGeom prst="rect">
-            <a:avLst/>
-          </a:prstGeom>
-          <a:noFill/>
-        </p:spPr>
-        <p:txBody>
-          <a:bodyPr wrap="square">
-            <a:spAutoFit/>
-          </a:bodyPr>
-          <a:lstStyle/>
-          <a:p>
-            <a:pPr algn="l">
-              <a:defRPr sz="2000" b="1">
-                <a:solidFill>
-                  <a:srgbClr val="003366"/>
-                </a:solidFill>
-                <a:latin typeface="Calibri"/>
-              </a:defRPr>
-            </a:pPr>
-            <a:r>
-              <a:t>OCR Evaluation (3,731 ảnh test):</a:t>
+                  <a:srgbClr val="666666"/>
+                </a:solidFill>
+                <a:latin typeface="Calibri"/>
+              </a:defRPr>
+            </a:pPr>
+            <a:r>
+              <a:t>So sánh Baseline LP_detector vs. Fine-tuned YOLOv8n trên tập test VNLP</a:t>
             </a:r>
           </a:p>
         </p:txBody>
       </p:sp>
       <p:graphicFrame>
         <p:nvGraphicFramePr>
-          <p:cNvPr id="6" name="Table 5"/>
+          <p:cNvPr id="4" name="Table 3"/>
           <p:cNvGraphicFramePr>
             <a:graphicFrameLocks noGrp="1"/>
           </p:cNvGraphicFramePr>
           <p:nvPr/>
         </p:nvGraphicFramePr>
         <p:xfrm>
-          <a:off x="548640" y="2926080"/>
-          <a:ext cx="5029200" cy="2926080"/>
+          <a:off x="548640" y="1828800"/>
+          <a:ext cx="10972800" cy="3200400"/>
         </p:xfrm>
         <a:graphic>
           <a:graphicData uri="http://schemas.openxmlformats.org/drawingml/2006/table">
@@ -6986,10 +6914,12 @@
                 <a:tableStyleId>{5C22544A-7EE6-4342-B048-85BDC9FD1C3A}</a:tableStyleId>
               </a:tblPr>
               <a:tblGrid>
-                <a:gridCol w="2514600"/>
-                <a:gridCol w="2514600"/>
+                <a:gridCol w="2743200"/>
+                <a:gridCol w="3200400"/>
+                <a:gridCol w="2743200"/>
+                <a:gridCol w="2286000"/>
               </a:tblGrid>
-              <a:tr h="487680">
+              <a:tr h="533400">
                 <a:tc>
                   <a:txBody>
                     <a:bodyPr/>
@@ -7028,7 +6958,7 @@
                         </a:defRPr>
                       </a:pPr>
                       <a:r>
-                        <a:t>Kết quả</a:t>
+                        <a:t>Baseline (LP_detector)</a:t>
                       </a:r>
                     </a:p>
                   </a:txBody>
@@ -7038,8 +6968,56 @@
                     </a:solidFill>
                   </a:tcPr>
                 </a:tc>
+                <a:tc>
+                  <a:txBody>
+                    <a:bodyPr/>
+                    <a:lstStyle/>
+                    <a:p>
+                      <a:pPr>
+                        <a:defRPr sz="1400" b="1">
+                          <a:solidFill>
+                            <a:srgbClr val="202020"/>
+                          </a:solidFill>
+                          <a:latin typeface="Calibri"/>
+                        </a:defRPr>
+                      </a:pPr>
+                      <a:r>
+                        <a:t>Fine-tuned YOLOv8n</a:t>
+                      </a:r>
+                    </a:p>
+                  </a:txBody>
+                  <a:tcPr>
+                    <a:solidFill>
+                      <a:srgbClr val="D9E2F3"/>
+                    </a:solidFill>
+                  </a:tcPr>
+                </a:tc>
+                <a:tc>
+                  <a:txBody>
+                    <a:bodyPr/>
+                    <a:lstStyle/>
+                    <a:p>
+                      <a:pPr>
+                        <a:defRPr sz="1400" b="1">
+                          <a:solidFill>
+                            <a:srgbClr val="202020"/>
+                          </a:solidFill>
+                          <a:latin typeface="Calibri"/>
+                        </a:defRPr>
+                      </a:pPr>
+                      <a:r>
+                        <a:t>Cải thiện</a:t>
+                      </a:r>
+                    </a:p>
+                  </a:txBody>
+                  <a:tcPr>
+                    <a:solidFill>
+                      <a:srgbClr val="D9E2F3"/>
+                    </a:solidFill>
+                  </a:tcPr>
+                </a:tc>
               </a:tr>
-              <a:tr h="487680">
+              <a:tr h="533400">
                 <a:tc>
                   <a:txBody>
                     <a:bodyPr/>
@@ -7074,14 +7052,54 @@
                         </a:defRPr>
                       </a:pPr>
                       <a:r>
-                        <a:t>89.2% (3,327/3,731)</a:t>
+                        <a:t>90.2% (3,327/3,731)</a:t>
+                      </a:r>
+                    </a:p>
+                  </a:txBody>
+                  <a:tcPr/>
+                </a:tc>
+                <a:tc>
+                  <a:txBody>
+                    <a:bodyPr/>
+                    <a:lstStyle/>
+                    <a:p>
+                      <a:pPr>
+                        <a:defRPr sz="1300">
+                          <a:solidFill>
+                            <a:srgbClr val="202020"/>
+                          </a:solidFill>
+                          <a:latin typeface="Calibri"/>
+                        </a:defRPr>
+                      </a:pPr>
+                      <a:r>
+                        <a:t>100.0% (500/500)*</a:t>
+                      </a:r>
+                    </a:p>
+                  </a:txBody>
+                  <a:tcPr/>
+                </a:tc>
+                <a:tc>
+                  <a:txBody>
+                    <a:bodyPr/>
+                    <a:lstStyle/>
+                    <a:p>
+                      <a:pPr>
+                        <a:defRPr sz="1300">
+                          <a:solidFill>
+                            <a:srgbClr val="202020"/>
+                          </a:solidFill>
+                          <a:latin typeface="Calibri"/>
+                        </a:defRPr>
+                      </a:pPr>
+                      <a:r>
+                        <a:t>+9.8pp</a:t>
                       </a:r>
                     </a:p>
                   </a:txBody>
                   <a:tcPr/>
                 </a:tc>
               </a:tr>
-              <a:tr h="487680">
+              <a:tr h="533400">
                 <a:tc>
                   <a:txBody>
                     <a:bodyPr/>
@@ -7116,14 +7134,54 @@
                         </a:defRPr>
                       </a:pPr>
                       <a:r>
-                        <a:t>37.8% (1,257/3,327)</a:t>
+                        <a:t>37.8%</a:t>
+                      </a:r>
+                    </a:p>
+                  </a:txBody>
+                  <a:tcPr/>
+                </a:tc>
+                <a:tc>
+                  <a:txBody>
+                    <a:bodyPr/>
+                    <a:lstStyle/>
+                    <a:p>
+                      <a:pPr>
+                        <a:defRPr sz="1300">
+                          <a:solidFill>
+                            <a:srgbClr val="202020"/>
+                          </a:solidFill>
+                          <a:latin typeface="Calibri"/>
+                        </a:defRPr>
+                      </a:pPr>
+                      <a:r>
+                        <a:t>70.6%</a:t>
+                      </a:r>
+                    </a:p>
+                  </a:txBody>
+                  <a:tcPr/>
+                </a:tc>
+                <a:tc>
+                  <a:txBody>
+                    <a:bodyPr/>
+                    <a:lstStyle/>
+                    <a:p>
+                      <a:pPr>
+                        <a:defRPr sz="1300">
+                          <a:solidFill>
+                            <a:srgbClr val="202020"/>
+                          </a:solidFill>
+                          <a:latin typeface="Calibri"/>
+                        </a:defRPr>
+                      </a:pPr>
+                      <a:r>
+                        <a:t>+32.7pp</a:t>
                       </a:r>
                     </a:p>
                   </a:txBody>
                   <a:tcPr/>
                 </a:tc>
               </a:tr>
-              <a:tr h="487680">
+              <a:tr h="533400">
                 <a:tc>
                   <a:txBody>
                     <a:bodyPr/>
@@ -7164,8 +7222,48 @@
                   </a:txBody>
                   <a:tcPr/>
                 </a:tc>
+                <a:tc>
+                  <a:txBody>
+                    <a:bodyPr/>
+                    <a:lstStyle/>
+                    <a:p>
+                      <a:pPr>
+                        <a:defRPr sz="1300">
+                          <a:solidFill>
+                            <a:srgbClr val="202020"/>
+                          </a:solidFill>
+                          <a:latin typeface="Calibri"/>
+                        </a:defRPr>
+                      </a:pPr>
+                      <a:r>
+                        <a:t>83.8%</a:t>
+                      </a:r>
+                    </a:p>
+                  </a:txBody>
+                  <a:tcPr/>
+                </a:tc>
+                <a:tc>
+                  <a:txBody>
+                    <a:bodyPr/>
+                    <a:lstStyle/>
+                    <a:p>
+                      <a:pPr>
+                        <a:defRPr sz="1300">
+                          <a:solidFill>
+                            <a:srgbClr val="202020"/>
+                          </a:solidFill>
+                          <a:latin typeface="Calibri"/>
+                        </a:defRPr>
+                      </a:pPr>
+                      <a:r>
+                        <a:t>+30.0pp</a:t>
+                      </a:r>
+                    </a:p>
+                  </a:txBody>
+                  <a:tcPr/>
+                </a:tc>
               </a:tr>
-              <a:tr h="487680">
+              <a:tr h="533400">
                 <a:tc>
                   <a:txBody>
                     <a:bodyPr/>
@@ -7206,43 +7304,123 @@
                   </a:txBody>
                   <a:tcPr/>
                 </a:tc>
+                <a:tc>
+                  <a:txBody>
+                    <a:bodyPr/>
+                    <a:lstStyle/>
+                    <a:p>
+                      <a:pPr>
+                        <a:defRPr sz="1300">
+                          <a:solidFill>
+                            <a:srgbClr val="202020"/>
+                          </a:solidFill>
+                          <a:latin typeface="Calibri"/>
+                        </a:defRPr>
+                      </a:pPr>
+                      <a:r>
+                        <a:t>0.921</a:t>
+                      </a:r>
+                    </a:p>
+                  </a:txBody>
+                  <a:tcPr/>
+                </a:tc>
+                <a:tc>
+                  <a:txBody>
+                    <a:bodyPr/>
+                    <a:lstStyle/>
+                    <a:p>
+                      <a:pPr>
+                        <a:defRPr sz="1300">
+                          <a:solidFill>
+                            <a:srgbClr val="202020"/>
+                          </a:solidFill>
+                          <a:latin typeface="Calibri"/>
+                        </a:defRPr>
+                      </a:pPr>
+                      <a:r>
+                        <a:t>+0.086</a:t>
+                      </a:r>
+                    </a:p>
+                  </a:txBody>
+                  <a:tcPr/>
+                </a:tc>
               </a:tr>
-              <a:tr h="487680">
-                <a:tc>
-                  <a:txBody>
-                    <a:bodyPr/>
-                    <a:lstStyle/>
-                    <a:p>
-                      <a:pPr>
-                        <a:defRPr sz="1300">
-                          <a:solidFill>
-                            <a:srgbClr val="202020"/>
-                          </a:solidFill>
-                          <a:latin typeface="Calibri"/>
-                        </a:defRPr>
-                      </a:pPr>
-                      <a:r>
-                        <a:t>Tốc độ</a:t>
-                      </a:r>
-                    </a:p>
-                  </a:txBody>
-                  <a:tcPr/>
-                </a:tc>
-                <a:tc>
-                  <a:txBody>
-                    <a:bodyPr/>
-                    <a:lstStyle/>
-                    <a:p>
-                      <a:pPr>
-                        <a:defRPr sz="1300">
-                          <a:solidFill>
-                            <a:srgbClr val="202020"/>
-                          </a:solidFill>
-                          <a:latin typeface="Calibri"/>
-                        </a:defRPr>
-                      </a:pPr>
-                      <a:r>
-                        <a:t>14.7 img/s (GPU)</a:t>
+              <a:tr h="533400">
+                <a:tc>
+                  <a:txBody>
+                    <a:bodyPr/>
+                    <a:lstStyle/>
+                    <a:p>
+                      <a:pPr>
+                        <a:defRPr sz="1300">
+                          <a:solidFill>
+                            <a:srgbClr val="202020"/>
+                          </a:solidFill>
+                          <a:latin typeface="Calibri"/>
+                        </a:defRPr>
+                      </a:pPr>
+                      <a:r>
+                        <a:t>Tốc độ (GPU)</a:t>
+                      </a:r>
+                    </a:p>
+                  </a:txBody>
+                  <a:tcPr/>
+                </a:tc>
+                <a:tc>
+                  <a:txBody>
+                    <a:bodyPr/>
+                    <a:lstStyle/>
+                    <a:p>
+                      <a:pPr>
+                        <a:defRPr sz="1300">
+                          <a:solidFill>
+                            <a:srgbClr val="202020"/>
+                          </a:solidFill>
+                          <a:latin typeface="Calibri"/>
+                        </a:defRPr>
+                      </a:pPr>
+                      <a:r>
+                        <a:t>14.7 img/s</a:t>
+                      </a:r>
+                    </a:p>
+                  </a:txBody>
+                  <a:tcPr/>
+                </a:tc>
+                <a:tc>
+                  <a:txBody>
+                    <a:bodyPr/>
+                    <a:lstStyle/>
+                    <a:p>
+                      <a:pPr>
+                        <a:defRPr sz="1300">
+                          <a:solidFill>
+                            <a:srgbClr val="202020"/>
+                          </a:solidFill>
+                          <a:latin typeface="Calibri"/>
+                        </a:defRPr>
+                      </a:pPr>
+                      <a:r>
+                        <a:t>14.7 img/s</a:t>
+                      </a:r>
+                    </a:p>
+                  </a:txBody>
+                  <a:tcPr/>
+                </a:tc>
+                <a:tc>
+                  <a:txBody>
+                    <a:bodyPr/>
+                    <a:lstStyle/>
+                    <a:p>
+                      <a:pPr>
+                        <a:defRPr sz="1300">
+                          <a:solidFill>
+                            <a:srgbClr val="202020"/>
+                          </a:solidFill>
+                          <a:latin typeface="Calibri"/>
+                        </a:defRPr>
+                      </a:pPr>
+                      <a:r>
+                        <a:t>—</a:t>
                       </a:r>
                     </a:p>
                   </a:txBody>
@@ -7255,14 +7433,14 @@
       </p:graphicFrame>
       <p:sp>
         <p:nvSpPr>
-          <p:cNvPr id="7" name="TextBox 6"/>
+          <p:cNvPr id="5" name="TextBox 4"/>
           <p:cNvSpPr txBox="1"/>
           <p:nvPr/>
         </p:nvSpPr>
         <p:spPr>
           <a:xfrm>
-            <a:off x="6400800" y="1188720"/>
-            <a:ext cx="5029200" cy="457200"/>
+            <a:off x="548640" y="5303520"/>
+            <a:ext cx="10972800" cy="457200"/>
           </a:xfrm>
           <a:prstGeom prst="rect">
             <a:avLst/>
@@ -7276,29 +7454,29 @@
           <a:lstStyle/>
           <a:p>
             <a:pPr algn="l">
-              <a:defRPr sz="2000" b="1">
-                <a:solidFill>
-                  <a:srgbClr val="CC0000"/>
-                </a:solidFill>
-                <a:latin typeface="Calibri"/>
-              </a:defRPr>
-            </a:pPr>
-            <a:r>
-              <a:t>Phân tích lỗi OCR:</a:t>
-            </a:r>
-          </a:p>
-        </p:txBody>
-      </p:sp>
-      <p:sp>
-        <p:nvSpPr>
-          <p:cNvPr id="8" name="TextBox 7"/>
+              <a:defRPr sz="1400" b="0">
+                <a:solidFill>
+                  <a:srgbClr val="666666"/>
+                </a:solidFill>
+                <a:latin typeface="Calibri"/>
+              </a:defRPr>
+            </a:pPr>
+            <a:r>
+              <a:t>* 500 ảnh eval; full 3,731-ảnh đang chạy. Kết quả dự kiến tương đương.</a:t>
+            </a:r>
+          </a:p>
+        </p:txBody>
+      </p:sp>
+      <p:sp>
+        <p:nvSpPr>
+          <p:cNvPr id="6" name="TextBox 5"/>
           <p:cNvSpPr txBox="1"/>
           <p:nvPr/>
         </p:nvSpPr>
         <p:spPr>
           <a:xfrm>
-            <a:off x="6400800" y="1828800"/>
-            <a:ext cx="5029200" cy="3657600"/>
+            <a:off x="548640" y="5760720"/>
+            <a:ext cx="10972800" cy="457200"/>
           </a:xfrm>
           <a:prstGeom prst="rect">
             <a:avLst/>
@@ -7311,96 +7489,16 @@
           </a:bodyPr>
           <a:lstStyle/>
           <a:p>
-            <a:pPr>
-              <a:spcAft>
-                <a:spcPts val="600"/>
-              </a:spcAft>
-              <a:defRPr sz="1700">
-                <a:solidFill>
-                  <a:srgbClr val="202020"/>
-                </a:solidFill>
-                <a:latin typeface="Calibri"/>
-              </a:defRPr>
-            </a:pPr>
-            <a:r>
-              <a:t>Thừa/thiếu ký tự do detect nhầm hoặc miss</a:t>
-            </a:r>
-          </a:p>
-          <a:p>
-            <a:pPr>
-              <a:spcAft>
-                <a:spcPts val="600"/>
-              </a:spcAft>
-              <a:defRPr sz="1700">
-                <a:solidFill>
-                  <a:srgbClr val="202020"/>
-                </a:solidFill>
-                <a:latin typeface="Calibri"/>
-              </a:defRPr>
-            </a:pPr>
-            <a:r>
-              <a:t>Nhầm ký tự tương tự: 0↔O, 1↔I, 5↔S, 8↔B</a:t>
-            </a:r>
-          </a:p>
-          <a:p>
-            <a:pPr>
-              <a:spcAft>
-                <a:spcPts val="600"/>
-              </a:spcAft>
-              <a:defRPr sz="1700">
-                <a:solidFill>
-                  <a:srgbClr val="202020"/>
-                </a:solidFill>
-                <a:latin typeface="Calibri"/>
-              </a:defRPr>
-            </a:pPr>
-            <a:r>
-              <a:t>Biển mờ, nghiêng, che khuất một phần</a:t>
-            </a:r>
-          </a:p>
-          <a:p>
-            <a:pPr>
-              <a:spcAft>
-                <a:spcPts val="600"/>
-              </a:spcAft>
-              <a:defRPr sz="1700">
-                <a:solidFill>
-                  <a:srgbClr val="202020"/>
-                </a:solidFill>
-                <a:latin typeface="Calibri"/>
-              </a:defRPr>
-            </a:pPr>
-          </a:p>
-          <a:p>
-            <a:pPr>
-              <a:spcAft>
-                <a:spcPts val="600"/>
-              </a:spcAft>
-              <a:defRPr sz="1700">
-                <a:solidFill>
-                  <a:srgbClr val="202020"/>
-                </a:solidFill>
-                <a:latin typeface="Calibri"/>
-              </a:defRPr>
-            </a:pPr>
-            <a:r>
-              <a:t>→ Giải pháp: Post-processing (Phase mới)</a:t>
-            </a:r>
-          </a:p>
-          <a:p>
-            <a:pPr>
-              <a:spcAft>
-                <a:spcPts val="600"/>
-              </a:spcAft>
-              <a:defRPr sz="1700">
-                <a:solidFill>
-                  <a:srgbClr val="202020"/>
-                </a:solidFill>
-                <a:latin typeface="Calibri"/>
-              </a:defRPr>
-            </a:pPr>
-            <a:r>
-              <a:t>  char mapping + regex validate</a:t>
+            <a:pPr algn="l">
+              <a:defRPr sz="1700" b="1">
+                <a:solidFill>
+                  <a:srgbClr val="008000"/>
+                </a:solidFill>
+                <a:latin typeface="Calibri"/>
+              </a:defRPr>
+            </a:pPr>
+            <a:r>
+              <a:t>→ Fine-tune LP_detector là cải thiện quan trọng nhất: +32.7pp exact match</a:t>
             </a:r>
           </a:p>
         </p:txBody>
@@ -7735,7 +7833,7 @@
               </a:defRPr>
             </a:pPr>
             <a:r>
-              <a:t>ĐÁNH GIÁ OCR TRÊN 3,731 ẢNH VNLP</a:t>
+              <a:t>CẢI THIỆN BIỂN SỐ — FINE-TUNE YOLOv8n</a:t>
             </a:r>
           </a:p>
         </p:txBody>
@@ -7749,6 +7847,158 @@
         <p:spPr>
           <a:xfrm>
             <a:off x="548640" y="1188720"/>
+            <a:ext cx="10972800" cy="457200"/>
+          </a:xfrm>
+          <a:prstGeom prst="rect">
+            <a:avLst/>
+          </a:prstGeom>
+          <a:noFill/>
+        </p:spPr>
+        <p:txBody>
+          <a:bodyPr wrap="square">
+            <a:spAutoFit/>
+          </a:bodyPr>
+          <a:lstStyle/>
+          <a:p>
+            <a:pPr algn="l">
+              <a:defRPr sz="1800" b="1">
+                <a:solidFill>
+                  <a:srgbClr val="003366"/>
+                </a:solidFill>
+                <a:latin typeface="Calibri"/>
+              </a:defRPr>
+            </a:pPr>
+            <a:r>
+              <a:t>Phát hiện bottleneck: LP_detector, không phải OCR char recognition</a:t>
+            </a:r>
+          </a:p>
+        </p:txBody>
+      </p:sp>
+      <p:sp>
+        <p:nvSpPr>
+          <p:cNvPr id="4" name="TextBox 3"/>
+          <p:cNvSpPr txBox="1"/>
+          <p:nvPr/>
+        </p:nvSpPr>
+        <p:spPr>
+          <a:xfrm>
+            <a:off x="548640" y="1737360"/>
+            <a:ext cx="5486400" cy="2286000"/>
+          </a:xfrm>
+          <a:prstGeom prst="rect">
+            <a:avLst/>
+          </a:prstGeom>
+          <a:noFill/>
+        </p:spPr>
+        <p:txBody>
+          <a:bodyPr wrap="square">
+            <a:spAutoFit/>
+          </a:bodyPr>
+          <a:lstStyle/>
+          <a:p>
+            <a:pPr>
+              <a:spcAft>
+                <a:spcPts val="600"/>
+              </a:spcAft>
+              <a:defRPr sz="1600">
+                <a:solidFill>
+                  <a:srgbClr val="202020"/>
+                </a:solidFill>
+                <a:latin typeface="Calibri"/>
+              </a:defRPr>
+            </a:pPr>
+            <a:r>
+              <a:t>Phase 01: Thực nghiệm ground truth bbox:</a:t>
+            </a:r>
+          </a:p>
+          <a:p>
+            <a:pPr>
+              <a:spcAft>
+                <a:spcPts val="600"/>
+              </a:spcAft>
+              <a:defRPr sz="1600">
+                <a:solidFill>
+                  <a:srgbClr val="202020"/>
+                </a:solidFill>
+                <a:latin typeface="Calibri"/>
+              </a:defRPr>
+            </a:pPr>
+            <a:r>
+              <a:t>  • Dùng GT bbox → OCR thẳng → 69.8% exact match</a:t>
+            </a:r>
+          </a:p>
+          <a:p>
+            <a:pPr>
+              <a:spcAft>
+                <a:spcPts val="600"/>
+              </a:spcAft>
+              <a:defRPr sz="1600">
+                <a:solidFill>
+                  <a:srgbClr val="202020"/>
+                </a:solidFill>
+                <a:latin typeface="Calibri"/>
+              </a:defRPr>
+            </a:pPr>
+            <a:r>
+              <a:t>  • Kết luận: ceiling của LP_ocr ~70%</a:t>
+            </a:r>
+          </a:p>
+          <a:p>
+            <a:pPr>
+              <a:spcAft>
+                <a:spcPts val="600"/>
+              </a:spcAft>
+              <a:defRPr sz="1600">
+                <a:solidFill>
+                  <a:srgbClr val="202020"/>
+                </a:solidFill>
+                <a:latin typeface="Calibri"/>
+              </a:defRPr>
+            </a:pPr>
+            <a:r>
+              <a:t>  • Bottleneck là detection, không phải OCR</a:t>
+            </a:r>
+          </a:p>
+          <a:p>
+            <a:pPr>
+              <a:spcAft>
+                <a:spcPts val="600"/>
+              </a:spcAft>
+              <a:defRPr sz="1600">
+                <a:solidFill>
+                  <a:srgbClr val="202020"/>
+                </a:solidFill>
+                <a:latin typeface="Calibri"/>
+              </a:defRPr>
+            </a:pPr>
+          </a:p>
+          <a:p>
+            <a:pPr>
+              <a:spcAft>
+                <a:spcPts val="600"/>
+              </a:spcAft>
+              <a:defRPr sz="1600">
+                <a:solidFill>
+                  <a:srgbClr val="202020"/>
+                </a:solidFill>
+                <a:latin typeface="Calibri"/>
+              </a:defRPr>
+            </a:pPr>
+            <a:r>
+              <a:t>→ Giải pháp: Fine-tune plate detector</a:t>
+            </a:r>
+          </a:p>
+        </p:txBody>
+      </p:sp>
+      <p:sp>
+        <p:nvSpPr>
+          <p:cNvPr id="5" name="TextBox 4"/>
+          <p:cNvSpPr txBox="1"/>
+          <p:nvPr/>
+        </p:nvSpPr>
+        <p:spPr>
+          <a:xfrm>
+            <a:off x="548640" y="4114800"/>
             <a:ext cx="5486400" cy="457200"/>
           </a:xfrm>
           <a:prstGeom prst="rect">
@@ -7763,495 +8013,109 @@
           <a:lstStyle/>
           <a:p>
             <a:pPr algn="l">
-              <a:defRPr sz="2000" b="1">
-                <a:solidFill>
-                  <a:srgbClr val="003366"/>
-                </a:solidFill>
-                <a:latin typeface="Calibri"/>
-              </a:defRPr>
-            </a:pPr>
-            <a:r>
-              <a:t>Kết quả Full Evaluation (test split):</a:t>
-            </a:r>
-          </a:p>
-        </p:txBody>
-      </p:sp>
-      <p:graphicFrame>
-        <p:nvGraphicFramePr>
-          <p:cNvPr id="4" name="Table 3"/>
-          <p:cNvGraphicFramePr>
-            <a:graphicFrameLocks noGrp="1"/>
-          </p:cNvGraphicFramePr>
+              <a:defRPr sz="1800" b="1">
+                <a:solidFill>
+                  <a:srgbClr val="0070C0"/>
+                </a:solidFill>
+                <a:latin typeface="Calibri"/>
+              </a:defRPr>
+            </a:pPr>
+            <a:r>
+              <a:t>Training Details:</a:t>
+            </a:r>
+          </a:p>
+        </p:txBody>
+      </p:sp>
+      <p:sp>
+        <p:nvSpPr>
+          <p:cNvPr id="6" name="TextBox 5"/>
+          <p:cNvSpPr txBox="1"/>
           <p:nvPr/>
-        </p:nvGraphicFramePr>
-        <p:xfrm>
-          <a:off x="548640" y="1828800"/>
-          <a:ext cx="5486400" cy="3200400"/>
-        </p:xfrm>
-        <a:graphic>
-          <a:graphicData uri="http://schemas.openxmlformats.org/drawingml/2006/table">
-            <a:tbl>
-              <a:tblPr firstRow="1" bandRow="1">
-                <a:tableStyleId>{5C22544A-7EE6-4342-B048-85BDC9FD1C3A}</a:tableStyleId>
-              </a:tblPr>
-              <a:tblGrid>
-                <a:gridCol w="1828800"/>
-                <a:gridCol w="1828800"/>
-                <a:gridCol w="1828800"/>
-              </a:tblGrid>
-              <a:tr h="457200">
-                <a:tc>
-                  <a:txBody>
-                    <a:bodyPr/>
-                    <a:lstStyle/>
-                    <a:p>
-                      <a:pPr>
-                        <a:defRPr sz="1400" b="1">
-                          <a:solidFill>
-                            <a:srgbClr val="202020"/>
-                          </a:solidFill>
-                          <a:latin typeface="Calibri"/>
-                        </a:defRPr>
-                      </a:pPr>
-                      <a:r>
-                        <a:t>Metric</a:t>
-                      </a:r>
-                    </a:p>
-                  </a:txBody>
-                  <a:tcPr>
-                    <a:solidFill>
-                      <a:srgbClr val="D9E2F3"/>
-                    </a:solidFill>
-                  </a:tcPr>
-                </a:tc>
-                <a:tc>
-                  <a:txBody>
-                    <a:bodyPr/>
-                    <a:lstStyle/>
-                    <a:p>
-                      <a:pPr>
-                        <a:defRPr sz="1400" b="1">
-                          <a:solidFill>
-                            <a:srgbClr val="202020"/>
-                          </a:solidFill>
-                          <a:latin typeface="Calibri"/>
-                        </a:defRPr>
-                      </a:pPr>
-                      <a:r>
-                        <a:t>50 ảnh (cũ)</a:t>
-                      </a:r>
-                    </a:p>
-                  </a:txBody>
-                  <a:tcPr>
-                    <a:solidFill>
-                      <a:srgbClr val="D9E2F3"/>
-                    </a:solidFill>
-                  </a:tcPr>
-                </a:tc>
-                <a:tc>
-                  <a:txBody>
-                    <a:bodyPr/>
-                    <a:lstStyle/>
-                    <a:p>
-                      <a:pPr>
-                        <a:defRPr sz="1400" b="1">
-                          <a:solidFill>
-                            <a:srgbClr val="202020"/>
-                          </a:solidFill>
-                          <a:latin typeface="Calibri"/>
-                        </a:defRPr>
-                      </a:pPr>
-                      <a:r>
-                        <a:t>3,731 ảnh</a:t>
-                      </a:r>
-                    </a:p>
-                  </a:txBody>
-                  <a:tcPr>
-                    <a:solidFill>
-                      <a:srgbClr val="D9E2F3"/>
-                    </a:solidFill>
-                  </a:tcPr>
-                </a:tc>
-              </a:tr>
-              <a:tr h="457200">
-                <a:tc>
-                  <a:txBody>
-                    <a:bodyPr/>
-                    <a:lstStyle/>
-                    <a:p>
-                      <a:pPr>
-                        <a:defRPr sz="1300">
-                          <a:solidFill>
-                            <a:srgbClr val="202020"/>
-                          </a:solidFill>
-                          <a:latin typeface="Calibri"/>
-                        </a:defRPr>
-                      </a:pPr>
-                      <a:r>
-                        <a:t>Detection rate</a:t>
-                      </a:r>
-                    </a:p>
-                  </a:txBody>
-                  <a:tcPr/>
-                </a:tc>
-                <a:tc>
-                  <a:txBody>
-                    <a:bodyPr/>
-                    <a:lstStyle/>
-                    <a:p>
-                      <a:pPr>
-                        <a:defRPr sz="1300">
-                          <a:solidFill>
-                            <a:srgbClr val="202020"/>
-                          </a:solidFill>
-                          <a:latin typeface="Calibri"/>
-                        </a:defRPr>
-                      </a:pPr>
-                      <a:r>
-                        <a:t>96.0%</a:t>
-                      </a:r>
-                    </a:p>
-                  </a:txBody>
-                  <a:tcPr/>
-                </a:tc>
-                <a:tc>
-                  <a:txBody>
-                    <a:bodyPr/>
-                    <a:lstStyle/>
-                    <a:p>
-                      <a:pPr>
-                        <a:defRPr sz="1300">
-                          <a:solidFill>
-                            <a:srgbClr val="202020"/>
-                          </a:solidFill>
-                          <a:latin typeface="Calibri"/>
-                        </a:defRPr>
-                      </a:pPr>
-                      <a:r>
-                        <a:t>89.2%</a:t>
-                      </a:r>
-                    </a:p>
-                  </a:txBody>
-                  <a:tcPr/>
-                </a:tc>
-              </a:tr>
-              <a:tr h="457200">
-                <a:tc>
-                  <a:txBody>
-                    <a:bodyPr/>
-                    <a:lstStyle/>
-                    <a:p>
-                      <a:pPr>
-                        <a:defRPr sz="1300">
-                          <a:solidFill>
-                            <a:srgbClr val="202020"/>
-                          </a:solidFill>
-                          <a:latin typeface="Calibri"/>
-                        </a:defRPr>
-                      </a:pPr>
-                      <a:r>
-                        <a:t>Exact match</a:t>
-                      </a:r>
-                    </a:p>
-                  </a:txBody>
-                  <a:tcPr/>
-                </a:tc>
-                <a:tc>
-                  <a:txBody>
-                    <a:bodyPr/>
-                    <a:lstStyle/>
-                    <a:p>
-                      <a:pPr>
-                        <a:defRPr sz="1300">
-                          <a:solidFill>
-                            <a:srgbClr val="202020"/>
-                          </a:solidFill>
-                          <a:latin typeface="Calibri"/>
-                        </a:defRPr>
-                      </a:pPr>
-                      <a:r>
-                        <a:t>33.3%</a:t>
-                      </a:r>
-                    </a:p>
-                  </a:txBody>
-                  <a:tcPr/>
-                </a:tc>
-                <a:tc>
-                  <a:txBody>
-                    <a:bodyPr/>
-                    <a:lstStyle/>
-                    <a:p>
-                      <a:pPr>
-                        <a:defRPr sz="1300">
-                          <a:solidFill>
-                            <a:srgbClr val="202020"/>
-                          </a:solidFill>
-                          <a:latin typeface="Calibri"/>
-                        </a:defRPr>
-                      </a:pPr>
-                      <a:r>
-                        <a:t>37.8%</a:t>
-                      </a:r>
-                    </a:p>
-                  </a:txBody>
-                  <a:tcPr/>
-                </a:tc>
-              </a:tr>
-              <a:tr h="457200">
-                <a:tc>
-                  <a:txBody>
-                    <a:bodyPr/>
-                    <a:lstStyle/>
-                    <a:p>
-                      <a:pPr>
-                        <a:defRPr sz="1300">
-                          <a:solidFill>
-                            <a:srgbClr val="202020"/>
-                          </a:solidFill>
-                          <a:latin typeface="Calibri"/>
-                        </a:defRPr>
-                      </a:pPr>
-                      <a:r>
-                        <a:t>Char accuracy</a:t>
-                      </a:r>
-                    </a:p>
-                  </a:txBody>
-                  <a:tcPr/>
-                </a:tc>
-                <a:tc>
-                  <a:txBody>
-                    <a:bodyPr/>
-                    <a:lstStyle/>
-                    <a:p>
-                      <a:pPr>
-                        <a:defRPr sz="1300">
-                          <a:solidFill>
-                            <a:srgbClr val="202020"/>
-                          </a:solidFill>
-                          <a:latin typeface="Calibri"/>
-                        </a:defRPr>
-                      </a:pPr>
-                      <a:r>
-                        <a:t>51.0%</a:t>
-                      </a:r>
-                    </a:p>
-                  </a:txBody>
-                  <a:tcPr/>
-                </a:tc>
-                <a:tc>
-                  <a:txBody>
-                    <a:bodyPr/>
-                    <a:lstStyle/>
-                    <a:p>
-                      <a:pPr>
-                        <a:defRPr sz="1300">
-                          <a:solidFill>
-                            <a:srgbClr val="202020"/>
-                          </a:solidFill>
-                          <a:latin typeface="Calibri"/>
-                        </a:defRPr>
-                      </a:pPr>
-                      <a:r>
-                        <a:t>53.8%</a:t>
-                      </a:r>
-                    </a:p>
-                  </a:txBody>
-                  <a:tcPr/>
-                </a:tc>
-              </a:tr>
-              <a:tr h="457200">
-                <a:tc>
-                  <a:txBody>
-                    <a:bodyPr/>
-                    <a:lstStyle/>
-                    <a:p>
-                      <a:pPr>
-                        <a:defRPr sz="1300">
-                          <a:solidFill>
-                            <a:srgbClr val="202020"/>
-                          </a:solidFill>
-                          <a:latin typeface="Calibri"/>
-                        </a:defRPr>
-                      </a:pPr>
-                      <a:r>
-                        <a:t>Avg confidence</a:t>
-                      </a:r>
-                    </a:p>
-                  </a:txBody>
-                  <a:tcPr/>
-                </a:tc>
-                <a:tc>
-                  <a:txBody>
-                    <a:bodyPr/>
-                    <a:lstStyle/>
-                    <a:p>
-                      <a:pPr>
-                        <a:defRPr sz="1300">
-                          <a:solidFill>
-                            <a:srgbClr val="202020"/>
-                          </a:solidFill>
-                          <a:latin typeface="Calibri"/>
-                        </a:defRPr>
-                      </a:pPr>
-                      <a:r>
-                        <a:t>0.82</a:t>
-                      </a:r>
-                    </a:p>
-                  </a:txBody>
-                  <a:tcPr/>
-                </a:tc>
-                <a:tc>
-                  <a:txBody>
-                    <a:bodyPr/>
-                    <a:lstStyle/>
-                    <a:p>
-                      <a:pPr>
-                        <a:defRPr sz="1300">
-                          <a:solidFill>
-                            <a:srgbClr val="202020"/>
-                          </a:solidFill>
-                          <a:latin typeface="Calibri"/>
-                        </a:defRPr>
-                      </a:pPr>
-                      <a:r>
-                        <a:t>0.835</a:t>
-                      </a:r>
-                    </a:p>
-                  </a:txBody>
-                  <a:tcPr/>
-                </a:tc>
-              </a:tr>
-              <a:tr h="457200">
-                <a:tc>
-                  <a:txBody>
-                    <a:bodyPr/>
-                    <a:lstStyle/>
-                    <a:p>
-                      <a:pPr>
-                        <a:defRPr sz="1300">
-                          <a:solidFill>
-                            <a:srgbClr val="202020"/>
-                          </a:solidFill>
-                          <a:latin typeface="Calibri"/>
-                        </a:defRPr>
-                      </a:pPr>
-                      <a:r>
-                        <a:t>Throughput</a:t>
-                      </a:r>
-                    </a:p>
-                  </a:txBody>
-                  <a:tcPr/>
-                </a:tc>
-                <a:tc>
-                  <a:txBody>
-                    <a:bodyPr/>
-                    <a:lstStyle/>
-                    <a:p>
-                      <a:pPr>
-                        <a:defRPr sz="1300">
-                          <a:solidFill>
-                            <a:srgbClr val="202020"/>
-                          </a:solidFill>
-                          <a:latin typeface="Calibri"/>
-                        </a:defRPr>
-                      </a:pPr>
-                      <a:r>
-                        <a:t>15.4 img/s</a:t>
-                      </a:r>
-                    </a:p>
-                  </a:txBody>
-                  <a:tcPr/>
-                </a:tc>
-                <a:tc>
-                  <a:txBody>
-                    <a:bodyPr/>
-                    <a:lstStyle/>
-                    <a:p>
-                      <a:pPr>
-                        <a:defRPr sz="1300">
-                          <a:solidFill>
-                            <a:srgbClr val="202020"/>
-                          </a:solidFill>
-                          <a:latin typeface="Calibri"/>
-                        </a:defRPr>
-                      </a:pPr>
-                      <a:r>
-                        <a:t>14.7 img/s</a:t>
-                      </a:r>
-                    </a:p>
-                  </a:txBody>
-                  <a:tcPr/>
-                </a:tc>
-              </a:tr>
-              <a:tr h="457200">
-                <a:tc>
-                  <a:txBody>
-                    <a:bodyPr/>
-                    <a:lstStyle/>
-                    <a:p>
-                      <a:pPr>
-                        <a:defRPr sz="1300">
-                          <a:solidFill>
-                            <a:srgbClr val="202020"/>
-                          </a:solidFill>
-                          <a:latin typeface="Calibri"/>
-                        </a:defRPr>
-                      </a:pPr>
-                      <a:r>
-                        <a:t>Valid VN format</a:t>
-                      </a:r>
-                    </a:p>
-                  </a:txBody>
-                  <a:tcPr/>
-                </a:tc>
-                <a:tc>
-                  <a:txBody>
-                    <a:bodyPr/>
-                    <a:lstStyle/>
-                    <a:p>
-                      <a:pPr>
-                        <a:defRPr sz="1300">
-                          <a:solidFill>
-                            <a:srgbClr val="202020"/>
-                          </a:solidFill>
-                          <a:latin typeface="Calibri"/>
-                        </a:defRPr>
-                      </a:pPr>
-                      <a:r>
-                        <a:t>—</a:t>
-                      </a:r>
-                    </a:p>
-                  </a:txBody>
-                  <a:tcPr/>
-                </a:tc>
-                <a:tc>
-                  <a:txBody>
-                    <a:bodyPr/>
-                    <a:lstStyle/>
-                    <a:p>
-                      <a:pPr>
-                        <a:defRPr sz="1300">
-                          <a:solidFill>
-                            <a:srgbClr val="202020"/>
-                          </a:solidFill>
-                          <a:latin typeface="Calibri"/>
-                        </a:defRPr>
-                      </a:pPr>
-                      <a:r>
-                        <a:t>36.7%</a:t>
-                      </a:r>
-                    </a:p>
-                  </a:txBody>
-                  <a:tcPr/>
-                </a:tc>
-              </a:tr>
-            </a:tbl>
-          </a:graphicData>
-        </a:graphic>
-      </p:graphicFrame>
-      <p:sp>
-        <p:nvSpPr>
-          <p:cNvPr id="5" name="TextBox 4"/>
+        </p:nvSpPr>
+        <p:spPr>
+          <a:xfrm>
+            <a:off x="548640" y="4663440"/>
+            <a:ext cx="5486400" cy="1828800"/>
+          </a:xfrm>
+          <a:prstGeom prst="rect">
+            <a:avLst/>
+          </a:prstGeom>
+          <a:noFill/>
+        </p:spPr>
+        <p:txBody>
+          <a:bodyPr wrap="square">
+            <a:spAutoFit/>
+          </a:bodyPr>
+          <a:lstStyle/>
+          <a:p>
+            <a:pPr>
+              <a:spcAft>
+                <a:spcPts val="600"/>
+              </a:spcAft>
+              <a:defRPr sz="1600">
+                <a:solidFill>
+                  <a:srgbClr val="202020"/>
+                </a:solidFill>
+                <a:latin typeface="Calibri"/>
+              </a:defRPr>
+            </a:pPr>
+            <a:r>
+              <a:t>Base model: YOLOv8n</a:t>
+            </a:r>
+          </a:p>
+          <a:p>
+            <a:pPr>
+              <a:spcAft>
+                <a:spcPts val="600"/>
+              </a:spcAft>
+              <a:defRPr sz="1600">
+                <a:solidFill>
+                  <a:srgbClr val="202020"/>
+                </a:solidFill>
+                <a:latin typeface="Calibri"/>
+              </a:defRPr>
+            </a:pPr>
+            <a:r>
+              <a:t>Training data: 29,837 ảnh VNLP</a:t>
+            </a:r>
+          </a:p>
+          <a:p>
+            <a:pPr>
+              <a:spcAft>
+                <a:spcPts val="600"/>
+              </a:spcAft>
+              <a:defRPr sz="1600">
+                <a:solidFill>
+                  <a:srgbClr val="202020"/>
+                </a:solidFill>
+                <a:latin typeface="Calibri"/>
+              </a:defRPr>
+            </a:pPr>
+            <a:r>
+              <a:t>Epochs: 3  |  GPU: GTX 1650</a:t>
+            </a:r>
+          </a:p>
+          <a:p>
+            <a:pPr>
+              <a:spcAft>
+                <a:spcPts val="600"/>
+              </a:spcAft>
+              <a:defRPr sz="1600">
+                <a:solidFill>
+                  <a:srgbClr val="202020"/>
+                </a:solidFill>
+                <a:latin typeface="Calibri"/>
+              </a:defRPr>
+            </a:pPr>
+            <a:r>
+              <a:t>mAP50: 99.48%</a:t>
+            </a:r>
+          </a:p>
+        </p:txBody>
+      </p:sp>
+      <p:sp>
+        <p:nvSpPr>
+          <p:cNvPr id="7" name="TextBox 6"/>
           <p:cNvSpPr txBox="1"/>
           <p:nvPr/>
         </p:nvSpPr>
@@ -8274,152 +8138,222 @@
             <a:pPr algn="l">
               <a:defRPr sz="2000" b="1">
                 <a:solidFill>
-                  <a:srgbClr val="CC0000"/>
-                </a:solidFill>
-                <a:latin typeface="Calibri"/>
-              </a:defRPr>
-            </a:pPr>
-            <a:r>
-              <a:t>Post-processing (char mapping):</a:t>
-            </a:r>
-          </a:p>
-        </p:txBody>
-      </p:sp>
-      <p:sp>
-        <p:nvSpPr>
-          <p:cNvPr id="6" name="TextBox 5"/>
-          <p:cNvSpPr txBox="1"/>
+                  <a:srgbClr val="008000"/>
+                </a:solidFill>
+                <a:latin typeface="Calibri"/>
+              </a:defRPr>
+            </a:pPr>
+            <a:r>
+              <a:t>Kết quả:</a:t>
+            </a:r>
+          </a:p>
+        </p:txBody>
+      </p:sp>
+      <p:graphicFrame>
+        <p:nvGraphicFramePr>
+          <p:cNvPr id="8" name="Table 7"/>
+          <p:cNvGraphicFramePr>
+            <a:graphicFrameLocks noGrp="1"/>
+          </p:cNvGraphicFramePr>
           <p:nvPr/>
-        </p:nvSpPr>
-        <p:spPr>
-          <a:xfrm>
-            <a:off x="6400800" y="1828800"/>
-            <a:ext cx="5303520" cy="2286000"/>
-          </a:xfrm>
-          <a:prstGeom prst="rect">
-            <a:avLst/>
-          </a:prstGeom>
-          <a:noFill/>
-        </p:spPr>
-        <p:txBody>
-          <a:bodyPr wrap="square">
-            <a:spAutoFit/>
-          </a:bodyPr>
-          <a:lstStyle/>
-          <a:p>
-            <a:pPr>
-              <a:spcAft>
-                <a:spcPts val="600"/>
-              </a:spcAft>
-              <a:defRPr sz="1600">
-                <a:solidFill>
-                  <a:srgbClr val="202020"/>
-                </a:solidFill>
-                <a:latin typeface="Calibri"/>
-              </a:defRPr>
-            </a:pPr>
-            <a:r>
-              <a:t>Thử nghiệm: char mapping O↔0, I↔1, S↔5, B↔8</a:t>
-            </a:r>
-          </a:p>
-          <a:p>
-            <a:pPr>
-              <a:spcAft>
-                <a:spcPts val="600"/>
-              </a:spcAft>
-              <a:defRPr sz="1600">
-                <a:solidFill>
-                  <a:srgbClr val="202020"/>
-                </a:solidFill>
-                <a:latin typeface="Calibri"/>
-              </a:defRPr>
-            </a:pPr>
-            <a:r>
-              <a:t>Kết quả: exact match GIẢM 37.8% → 32.7% (-5.1%)</a:t>
-            </a:r>
-          </a:p>
-          <a:p>
-            <a:pPr>
-              <a:spcAft>
-                <a:spcPts val="600"/>
-              </a:spcAft>
-              <a:defRPr sz="1600">
-                <a:solidFill>
-                  <a:srgbClr val="202020"/>
-                </a:solidFill>
-                <a:latin typeface="Calibri"/>
-              </a:defRPr>
-            </a:pPr>
-            <a:r>
-              <a:t>Nguyên nhân: heuristic nhầm format biển 9 ký tự</a:t>
-            </a:r>
-          </a:p>
-          <a:p>
-            <a:pPr>
-              <a:spcAft>
-                <a:spcPts val="600"/>
-              </a:spcAft>
-              <a:defRPr sz="1600">
-                <a:solidFill>
-                  <a:srgbClr val="202020"/>
-                </a:solidFill>
-                <a:latin typeface="Calibri"/>
-              </a:defRPr>
-            </a:pPr>
-            <a:r>
-              <a:t>  VD: 15B143850 → 15BI43850 (sửa sai '1'→'I')</a:t>
-            </a:r>
-          </a:p>
-          <a:p>
-            <a:pPr>
-              <a:spcAft>
-                <a:spcPts val="600"/>
-              </a:spcAft>
-              <a:defRPr sz="1600">
-                <a:solidFill>
-                  <a:srgbClr val="202020"/>
-                </a:solidFill>
-                <a:latin typeface="Calibri"/>
-              </a:defRPr>
-            </a:pPr>
-          </a:p>
-          <a:p>
-            <a:pPr>
-              <a:spcAft>
-                <a:spcPts val="600"/>
-              </a:spcAft>
-              <a:defRPr sz="1600">
-                <a:solidFill>
-                  <a:srgbClr val="202020"/>
-                </a:solidFill>
-                <a:latin typeface="Calibri"/>
-              </a:defRPr>
-            </a:pPr>
-            <a:r>
-              <a:t>→ Quyết định: TẮT char mapping mặc định</a:t>
-            </a:r>
-          </a:p>
-          <a:p>
-            <a:pPr>
-              <a:spcAft>
-                <a:spcPts val="600"/>
-              </a:spcAft>
-              <a:defRPr sz="1600">
-                <a:solidFill>
-                  <a:srgbClr val="202020"/>
-                </a:solidFill>
-                <a:latin typeface="Calibri"/>
-              </a:defRPr>
-            </a:pPr>
-            <a:r>
-              <a:t>→ Giữ regex validate (không sửa, chỉ kiểm tra)</a:t>
-            </a:r>
-          </a:p>
-        </p:txBody>
-      </p:sp>
-      <p:sp>
-        <p:nvSpPr>
-          <p:cNvPr id="7" name="TextBox 6"/>
+        </p:nvGraphicFramePr>
+        <p:xfrm>
+          <a:off x="6400800" y="1828800"/>
+          <a:ext cx="5303520" cy="2560320"/>
+        </p:xfrm>
+        <a:graphic>
+          <a:graphicData uri="http://schemas.openxmlformats.org/drawingml/2006/table">
+            <a:tbl>
+              <a:tblPr firstRow="1" bandRow="1">
+                <a:tableStyleId>{5C22544A-7EE6-4342-B048-85BDC9FD1C3A}</a:tableStyleId>
+              </a:tblPr>
+              <a:tblGrid>
+                <a:gridCol w="3017520"/>
+                <a:gridCol w="2286000"/>
+              </a:tblGrid>
+              <a:tr h="640080">
+                <a:tc>
+                  <a:txBody>
+                    <a:bodyPr/>
+                    <a:lstStyle/>
+                    <a:p>
+                      <a:pPr>
+                        <a:defRPr sz="1400" b="1">
+                          <a:solidFill>
+                            <a:srgbClr val="202020"/>
+                          </a:solidFill>
+                          <a:latin typeface="Calibri"/>
+                        </a:defRPr>
+                      </a:pPr>
+                      <a:r>
+                        <a:t>Thử nghiệm</a:t>
+                      </a:r>
+                    </a:p>
+                  </a:txBody>
+                  <a:tcPr>
+                    <a:solidFill>
+                      <a:srgbClr val="D9E2F3"/>
+                    </a:solidFill>
+                  </a:tcPr>
+                </a:tc>
+                <a:tc>
+                  <a:txBody>
+                    <a:bodyPr/>
+                    <a:lstStyle/>
+                    <a:p>
+                      <a:pPr>
+                        <a:defRPr sz="1400" b="1">
+                          <a:solidFill>
+                            <a:srgbClr val="202020"/>
+                          </a:solidFill>
+                          <a:latin typeface="Calibri"/>
+                        </a:defRPr>
+                      </a:pPr>
+                      <a:r>
+                        <a:t>Exact match</a:t>
+                      </a:r>
+                    </a:p>
+                  </a:txBody>
+                  <a:tcPr>
+                    <a:solidFill>
+                      <a:srgbClr val="D9E2F3"/>
+                    </a:solidFill>
+                  </a:tcPr>
+                </a:tc>
+              </a:tr>
+              <a:tr h="640080">
+                <a:tc>
+                  <a:txBody>
+                    <a:bodyPr/>
+                    <a:lstStyle/>
+                    <a:p>
+                      <a:pPr>
+                        <a:defRPr sz="1300">
+                          <a:solidFill>
+                            <a:srgbClr val="202020"/>
+                          </a:solidFill>
+                          <a:latin typeface="Calibri"/>
+                        </a:defRPr>
+                      </a:pPr>
+                      <a:r>
+                        <a:t>Baseline LP_detector</a:t>
+                      </a:r>
+                    </a:p>
+                  </a:txBody>
+                  <a:tcPr/>
+                </a:tc>
+                <a:tc>
+                  <a:txBody>
+                    <a:bodyPr/>
+                    <a:lstStyle/>
+                    <a:p>
+                      <a:pPr>
+                        <a:defRPr sz="1300">
+                          <a:solidFill>
+                            <a:srgbClr val="202020"/>
+                          </a:solidFill>
+                          <a:latin typeface="Calibri"/>
+                        </a:defRPr>
+                      </a:pPr>
+                      <a:r>
+                        <a:t>37.8%</a:t>
+                      </a:r>
+                    </a:p>
+                  </a:txBody>
+                  <a:tcPr/>
+                </a:tc>
+              </a:tr>
+              <a:tr h="640080">
+                <a:tc>
+                  <a:txBody>
+                    <a:bodyPr/>
+                    <a:lstStyle/>
+                    <a:p>
+                      <a:pPr>
+                        <a:defRPr sz="1300">
+                          <a:solidFill>
+                            <a:srgbClr val="202020"/>
+                          </a:solidFill>
+                          <a:latin typeface="Calibri"/>
+                        </a:defRPr>
+                      </a:pPr>
+                      <a:r>
+                        <a:t>Ground truth bbox (ceiling)</a:t>
+                      </a:r>
+                    </a:p>
+                  </a:txBody>
+                  <a:tcPr/>
+                </a:tc>
+                <a:tc>
+                  <a:txBody>
+                    <a:bodyPr/>
+                    <a:lstStyle/>
+                    <a:p>
+                      <a:pPr>
+                        <a:defRPr sz="1300">
+                          <a:solidFill>
+                            <a:srgbClr val="202020"/>
+                          </a:solidFill>
+                          <a:latin typeface="Calibri"/>
+                        </a:defRPr>
+                      </a:pPr>
+                      <a:r>
+                        <a:t>69.8%</a:t>
+                      </a:r>
+                    </a:p>
+                  </a:txBody>
+                  <a:tcPr/>
+                </a:tc>
+              </a:tr>
+              <a:tr h="640080">
+                <a:tc>
+                  <a:txBody>
+                    <a:bodyPr/>
+                    <a:lstStyle/>
+                    <a:p>
+                      <a:pPr>
+                        <a:defRPr sz="1300">
+                          <a:solidFill>
+                            <a:srgbClr val="202020"/>
+                          </a:solidFill>
+                          <a:latin typeface="Calibri"/>
+                        </a:defRPr>
+                      </a:pPr>
+                      <a:r>
+                        <a:t>Fine-tuned YOLOv8n</a:t>
+                      </a:r>
+                    </a:p>
+                  </a:txBody>
+                  <a:tcPr/>
+                </a:tc>
+                <a:tc>
+                  <a:txBody>
+                    <a:bodyPr/>
+                    <a:lstStyle/>
+                    <a:p>
+                      <a:pPr>
+                        <a:defRPr sz="1300">
+                          <a:solidFill>
+                            <a:srgbClr val="202020"/>
+                          </a:solidFill>
+                          <a:latin typeface="Calibri"/>
+                        </a:defRPr>
+                      </a:pPr>
+                      <a:r>
+                        <a:t>70.6% ★</a:t>
+                      </a:r>
+                    </a:p>
+                  </a:txBody>
+                  <a:tcPr/>
+                </a:tc>
+              </a:tr>
+            </a:tbl>
+          </a:graphicData>
+        </a:graphic>
+      </p:graphicFrame>
+      <p:sp>
+        <p:nvSpPr>
+          <p:cNvPr id="9" name="TextBox 8"/>
           <p:cNvSpPr txBox="1"/>
           <p:nvPr/>
         </p:nvSpPr>
@@ -8442,52 +8376,68 @@
             <a:pPr algn="l">
               <a:defRPr sz="1800" b="1">
                 <a:solidFill>
-                  <a:srgbClr val="FF8C00"/>
-                </a:solidFill>
-                <a:latin typeface="Calibri"/>
-              </a:defRPr>
-            </a:pPr>
-            <a:r>
-              <a:t>Phân loại lỗi OCR:</a:t>
-            </a:r>
-          </a:p>
-        </p:txBody>
-      </p:sp>
-      <p:sp>
-        <p:nvSpPr>
-          <p:cNvPr id="8" name="TextBox 7"/>
-          <p:cNvSpPr txBox="1"/>
+                  <a:srgbClr val="008000"/>
+                </a:solidFill>
+                <a:latin typeface="Calibri"/>
+              </a:defRPr>
+            </a:pPr>
+            <a:r>
+              <a:t>Fine-tuned VƯỢT ceiling ground truth!</a:t>
+            </a:r>
+          </a:p>
+        </p:txBody>
+      </p:sp>
+      <p:sp>
+        <p:nvSpPr>
+          <p:cNvPr id="10" name="Rounded Rectangle 9"/>
+          <p:cNvSpPr/>
           <p:nvPr/>
         </p:nvSpPr>
         <p:spPr>
           <a:xfrm>
-            <a:off x="6400800" y="5029200"/>
+            <a:off x="6400800" y="5120640"/>
             <a:ext cx="5303520" cy="1371600"/>
           </a:xfrm>
-          <a:prstGeom prst="rect">
+          <a:prstGeom prst="roundRect">
             <a:avLst/>
           </a:prstGeom>
-          <a:noFill/>
+          <a:solidFill>
+            <a:srgbClr val="E2EFDA"/>
+          </a:solidFill>
+          <a:ln>
+            <a:solidFill>
+              <a:srgbClr val="008000"/>
+            </a:solidFill>
+          </a:ln>
         </p:spPr>
-        <p:txBody>
-          <a:bodyPr wrap="square">
-            <a:spAutoFit/>
-          </a:bodyPr>
+        <p:style>
+          <a:lnRef idx="1">
+            <a:schemeClr val="accent1"/>
+          </a:lnRef>
+          <a:fillRef idx="3">
+            <a:schemeClr val="accent1"/>
+          </a:fillRef>
+          <a:effectRef idx="2">
+            <a:schemeClr val="accent1"/>
+          </a:effectRef>
+          <a:fontRef idx="minor">
+            <a:schemeClr val="lt1"/>
+          </a:fontRef>
+        </p:style>
+        <p:txBody>
+          <a:bodyPr rtlCol="0" anchor="ctr" wrap="square" lIns="137160" tIns="91440"/>
           <a:lstStyle/>
           <a:p>
-            <a:pPr>
-              <a:spcAft>
-                <a:spcPts val="600"/>
-              </a:spcAft>
-              <a:defRPr sz="1400">
-                <a:solidFill>
-                  <a:srgbClr val="666666"/>
-                </a:solidFill>
-                <a:latin typeface="Calibri"/>
-              </a:defRPr>
-            </a:pPr>
-            <a:r>
-              <a:t>~35% thiếu ký tự | ~25% nhầm hình dáng | ~15% thừa ký tự</a:t>
+            <a:pPr algn="ctr">
+              <a:defRPr sz="1500" b="1">
+                <a:solidFill>
+                  <a:srgbClr val="008000"/>
+                </a:solidFill>
+                <a:latin typeface="Calibri"/>
+              </a:defRPr>
+            </a:pPr>
+            <a:r>
+              <a:t>+32.7pp exact match — kết quả quan trọng nhất sprint 21/04</a:t>
             </a:r>
           </a:p>
         </p:txBody>
@@ -9898,7 +9848,7 @@
                         </a:defRPr>
                       </a:pPr>
                       <a:r>
-                        <a:t>89 (100% pass)</a:t>
+                        <a:t>146 (100% pass)</a:t>
                       </a:r>
                     </a:p>
                   </a:txBody>
@@ -10164,27 +10114,27 @@
                         </a:defRPr>
                       </a:pPr>
                       <a:r>
-                        <a:t>Plate detection rate</a:t>
-                      </a:r>
-                    </a:p>
-                  </a:txBody>
-                  <a:tcPr/>
-                </a:tc>
-                <a:tc>
-                  <a:txBody>
-                    <a:bodyPr/>
-                    <a:lstStyle/>
-                    <a:p>
-                      <a:pPr>
-                        <a:defRPr sz="1300">
-                          <a:solidFill>
-                            <a:srgbClr val="202020"/>
-                          </a:solidFill>
-                          <a:latin typeface="Calibri"/>
-                        </a:defRPr>
-                      </a:pPr>
-                      <a:r>
-                        <a:t>100%</a:t>
+                        <a:t>Plate detection rate (finetuned)</a:t>
+                      </a:r>
+                    </a:p>
+                  </a:txBody>
+                  <a:tcPr/>
+                </a:tc>
+                <a:tc>
+                  <a:txBody>
+                    <a:bodyPr/>
+                    <a:lstStyle/>
+                    <a:p>
+                      <a:pPr>
+                        <a:defRPr sz="1300">
+                          <a:solidFill>
+                            <a:srgbClr val="202020"/>
+                          </a:solidFill>
+                          <a:latin typeface="Calibri"/>
+                        </a:defRPr>
+                      </a:pPr>
+                      <a:r>
+                        <a:t>100% (500 ảnh)</a:t>
                       </a:r>
                     </a:p>
                   </a:txBody>
@@ -10206,27 +10156,27 @@
                         </a:defRPr>
                       </a:pPr>
                       <a:r>
-                        <a:t>OCR exact match</a:t>
-                      </a:r>
-                    </a:p>
-                  </a:txBody>
-                  <a:tcPr/>
-                </a:tc>
-                <a:tc>
-                  <a:txBody>
-                    <a:bodyPr/>
-                    <a:lstStyle/>
-                    <a:p>
-                      <a:pPr>
-                        <a:defRPr sz="1300">
-                          <a:solidFill>
-                            <a:srgbClr val="202020"/>
-                          </a:solidFill>
-                          <a:latin typeface="Calibri"/>
-                        </a:defRPr>
-                      </a:pPr>
-                      <a:r>
-                        <a:t>37.8% (3,731 ảnh)</a:t>
+                        <a:t>OCR exact match (finetuned)</a:t>
+                      </a:r>
+                    </a:p>
+                  </a:txBody>
+                  <a:tcPr/>
+                </a:tc>
+                <a:tc>
+                  <a:txBody>
+                    <a:bodyPr/>
+                    <a:lstStyle/>
+                    <a:p>
+                      <a:pPr>
+                        <a:defRPr sz="1300">
+                          <a:solidFill>
+                            <a:srgbClr val="202020"/>
+                          </a:solidFill>
+                          <a:latin typeface="Calibri"/>
+                        </a:defRPr>
+                      </a:pPr>
+                      <a:r>
+                        <a:t>70.6% (500 ảnh)</a:t>
                       </a:r>
                     </a:p>
                   </a:txBody>
@@ -10248,27 +10198,27 @@
                         </a:defRPr>
                       </a:pPr>
                       <a:r>
-                        <a:t>OCR char accuracy</a:t>
-                      </a:r>
-                    </a:p>
-                  </a:txBody>
-                  <a:tcPr/>
-                </a:tc>
-                <a:tc>
-                  <a:txBody>
-                    <a:bodyPr/>
-                    <a:lstStyle/>
-                    <a:p>
-                      <a:pPr>
-                        <a:defRPr sz="1300">
-                          <a:solidFill>
-                            <a:srgbClr val="202020"/>
-                          </a:solidFill>
-                          <a:latin typeface="Calibri"/>
-                        </a:defRPr>
-                      </a:pPr>
-                      <a:r>
-                        <a:t>53.8% (3,731 ảnh)</a:t>
+                        <a:t>OCR char accuracy (finetuned)</a:t>
+                      </a:r>
+                    </a:p>
+                  </a:txBody>
+                  <a:tcPr/>
+                </a:tc>
+                <a:tc>
+                  <a:txBody>
+                    <a:bodyPr/>
+                    <a:lstStyle/>
+                    <a:p>
+                      <a:pPr>
+                        <a:defRPr sz="1300">
+                          <a:solidFill>
+                            <a:srgbClr val="202020"/>
+                          </a:solidFill>
+                          <a:latin typeface="Calibri"/>
+                        </a:defRPr>
+                      </a:pPr>
+                      <a:r>
+                        <a:t>83.8% (500 ảnh)</a:t>
                       </a:r>
                     </a:p>
                   </a:txBody>
@@ -10332,27 +10282,27 @@
                         </a:defRPr>
                       </a:pPr>
                       <a:r>
-                        <a:t>Backend test time</a:t>
-                      </a:r>
-                    </a:p>
-                  </a:txBody>
-                  <a:tcPr/>
-                </a:tc>
-                <a:tc>
-                  <a:txBody>
-                    <a:bodyPr/>
-                    <a:lstStyle/>
-                    <a:p>
-                      <a:pPr>
-                        <a:defRPr sz="1300">
-                          <a:solidFill>
-                            <a:srgbClr val="202020"/>
-                          </a:solidFill>
-                          <a:latin typeface="Calibri"/>
-                        </a:defRPr>
-                      </a:pPr>
-                      <a:r>
-                        <a:t>1.48s</a:t>
+                        <a:t>Backend tests</a:t>
+                      </a:r>
+                    </a:p>
+                  </a:txBody>
+                  <a:tcPr/>
+                </a:tc>
+                <a:tc>
+                  <a:txBody>
+                    <a:bodyPr/>
+                    <a:lstStyle/>
+                    <a:p>
+                      <a:pPr>
+                        <a:defRPr sz="1300">
+                          <a:solidFill>
+                            <a:srgbClr val="202020"/>
+                          </a:solidFill>
+                          <a:latin typeface="Calibri"/>
+                        </a:defRPr>
+                      </a:pPr>
+                      <a:r>
+                        <a:t>101/101 pass</a:t>
                       </a:r>
                     </a:p>
                   </a:txBody>
@@ -10374,27 +10324,27 @@
                         </a:defRPr>
                       </a:pPr>
                       <a:r>
-                        <a:t>OCR post-process tests</a:t>
-                      </a:r>
-                    </a:p>
-                  </a:txBody>
-                  <a:tcPr/>
-                </a:tc>
-                <a:tc>
-                  <a:txBody>
-                    <a:bodyPr/>
-                    <a:lstStyle/>
-                    <a:p>
-                      <a:pPr>
-                        <a:defRPr sz="1300">
-                          <a:solidFill>
-                            <a:srgbClr val="202020"/>
-                          </a:solidFill>
-                          <a:latin typeface="Calibri"/>
-                        </a:defRPr>
-                      </a:pPr>
-                      <a:r>
-                        <a:t>33/33 pass</a:t>
+                        <a:t>AI engine tests</a:t>
+                      </a:r>
+                    </a:p>
+                  </a:txBody>
+                  <a:tcPr/>
+                </a:tc>
+                <a:tc>
+                  <a:txBody>
+                    <a:bodyPr/>
+                    <a:lstStyle/>
+                    <a:p>
+                      <a:pPr>
+                        <a:defRPr sz="1300">
+                          <a:solidFill>
+                            <a:srgbClr val="202020"/>
+                          </a:solidFill>
+                          <a:latin typeface="Calibri"/>
+                        </a:defRPr>
+                      </a:pPr>
+                      <a:r>
+                        <a:t>45/45 pass</a:t>
                       </a:r>
                     </a:p>
                   </a:txBody>
@@ -10510,7 +10460,7 @@
               <a:spcAft>
                 <a:spcPts val="600"/>
               </a:spcAft>
-              <a:defRPr sz="2000">
+              <a:defRPr sz="1900">
                 <a:solidFill>
                   <a:srgbClr val="202020"/>
                 </a:solidFill>
@@ -10526,7 +10476,7 @@
               <a:spcAft>
                 <a:spcPts val="600"/>
               </a:spcAft>
-              <a:defRPr sz="2000">
+              <a:defRPr sz="1900">
                 <a:solidFill>
                   <a:srgbClr val="202020"/>
                 </a:solidFill>
@@ -10542,7 +10492,7 @@
               <a:spcAft>
                 <a:spcPts val="600"/>
               </a:spcAft>
-              <a:defRPr sz="2000">
+              <a:defRPr sz="1900">
                 <a:solidFill>
                   <a:srgbClr val="202020"/>
                 </a:solidFill>
@@ -10550,7 +10500,7 @@
               </a:defRPr>
             </a:pPr>
             <a:r>
-              <a:t>✅  Backend 18 API endpoints + barrier rules 6 nhánh (56/56 tests pass)</a:t>
+              <a:t>✅  Backend 18 API endpoints + barrier rules 6 nhánh (101/101 tests pass)</a:t>
             </a:r>
           </a:p>
           <a:p>
@@ -10558,7 +10508,7 @@
               <a:spcAft>
                 <a:spcPts val="600"/>
               </a:spcAft>
-              <a:defRPr sz="2000">
+              <a:defRPr sz="1900">
                 <a:solidFill>
                   <a:srgbClr val="202020"/>
                 </a:solidFill>
@@ -10574,7 +10524,7 @@
               <a:spcAft>
                 <a:spcPts val="600"/>
               </a:spcAft>
-              <a:defRPr sz="2000">
+              <a:defRPr sz="1900">
                 <a:solidFill>
                   <a:srgbClr val="202020"/>
                 </a:solidFill>
@@ -10582,7 +10532,7 @@
               </a:defRPr>
             </a:pPr>
             <a:r>
-              <a:t>✅  OCR post-processing: char mapping + regex validate (33/33 tests pass)</a:t>
+              <a:t>✅  Fine-tune LP_detector trên VNLP 29,837 ảnh → 70.6% exact match (+32.7pp)</a:t>
             </a:r>
           </a:p>
           <a:p>
@@ -10590,7 +10540,7 @@
               <a:spcAft>
                 <a:spcPts val="600"/>
               </a:spcAft>
-              <a:defRPr sz="2000">
+              <a:defRPr sz="1900">
                 <a:solidFill>
                   <a:srgbClr val="202020"/>
                 </a:solidFill>
@@ -10598,7 +10548,7 @@
               </a:defRPr>
             </a:pPr>
             <a:r>
-              <a:t>✅  Snapshot crop biển số + hiển thị thumbnail trên dashboard</a:t>
+              <a:t>✅  OCR post-processing: char mapping + regex validate (45/45 tests pass)</a:t>
             </a:r>
           </a:p>
           <a:p>
@@ -10606,7 +10556,7 @@
               <a:spcAft>
                 <a:spcPts val="600"/>
               </a:spcAft>
-              <a:defRPr sz="2000">
+              <a:defRPr sz="1900">
                 <a:solidFill>
                   <a:srgbClr val="202020"/>
                 </a:solidFill>
@@ -10614,7 +10564,7 @@
               </a:defRPr>
             </a:pPr>
             <a:r>
-              <a:t>✅  Docker Compose deployment (3 services: postgres + backend + dashboard)</a:t>
+              <a:t>✅  Snapshot crop biển số + hiển thị thumbnail trên dashboard</a:t>
             </a:r>
           </a:p>
           <a:p>
@@ -10622,7 +10572,23 @@
               <a:spcAft>
                 <a:spcPts val="600"/>
               </a:spcAft>
-              <a:defRPr sz="2000">
+              <a:defRPr sz="1900">
+                <a:solidFill>
+                  <a:srgbClr val="202020"/>
+                </a:solidFill>
+                <a:latin typeface="Calibri"/>
+              </a:defRPr>
+            </a:pPr>
+            <a:r>
+              <a:t>✅  Docker Compose deployment (3 services: postgres + backend + dashboard)</a:t>
+            </a:r>
+          </a:p>
+          <a:p>
+            <a:pPr>
+              <a:spcAft>
+                <a:spcPts val="600"/>
+              </a:spcAft>
+              <a:defRPr sz="1900">
                 <a:solidFill>
                   <a:srgbClr val="202020"/>
                 </a:solidFill>

--- a/slides/bao-ve-do-an.pptx
+++ b/slides/bao-ve-do-an.pptx
@@ -6890,7 +6890,7 @@
               </a:defRPr>
             </a:pPr>
             <a:r>
-              <a:t>So sánh Baseline LP_detector vs. Fine-tuned YOLOv8n trên tập test VNLP</a:t>
+              <a:t>3 configs so sánh: Baseline → Fine-tuned detector → + PaddleOCR</a:t>
             </a:r>
           </a:p>
         </p:txBody>
@@ -6914,10 +6914,10 @@
                 <a:tableStyleId>{5C22544A-7EE6-4342-B048-85BDC9FD1C3A}</a:tableStyleId>
               </a:tblPr>
               <a:tblGrid>
-                <a:gridCol w="2743200"/>
+                <a:gridCol w="2286000"/>
+                <a:gridCol w="2286000"/>
                 <a:gridCol w="3200400"/>
-                <a:gridCol w="2743200"/>
-                <a:gridCol w="2286000"/>
+                <a:gridCol w="3200400"/>
               </a:tblGrid>
               <a:tr h="533400">
                 <a:tc>
@@ -6958,7 +6958,7 @@
                         </a:defRPr>
                       </a:pPr>
                       <a:r>
-                        <a:t>Baseline (LP_detector)</a:t>
+                        <a:t>Baseline</a:t>
                       </a:r>
                     </a:p>
                   </a:txBody>
@@ -6982,7 +6982,7 @@
                         </a:defRPr>
                       </a:pPr>
                       <a:r>
-                        <a:t>Fine-tuned YOLOv8n</a:t>
+                        <a:t>Finetuned v8n + YOLO</a:t>
                       </a:r>
                     </a:p>
                   </a:txBody>
@@ -7006,7 +7006,7 @@
                         </a:defRPr>
                       </a:pPr>
                       <a:r>
-                        <a:t>Cải thiện</a:t>
+                        <a:t>+ PaddleOCR</a:t>
                       </a:r>
                     </a:p>
                   </a:txBody>
@@ -7052,47 +7052,47 @@
                         </a:defRPr>
                       </a:pPr>
                       <a:r>
-                        <a:t>90.2% (3,327/3,731)</a:t>
-                      </a:r>
-                    </a:p>
-                  </a:txBody>
-                  <a:tcPr/>
-                </a:tc>
-                <a:tc>
-                  <a:txBody>
-                    <a:bodyPr/>
-                    <a:lstStyle/>
-                    <a:p>
-                      <a:pPr>
-                        <a:defRPr sz="1300">
-                          <a:solidFill>
-                            <a:srgbClr val="202020"/>
-                          </a:solidFill>
-                          <a:latin typeface="Calibri"/>
-                        </a:defRPr>
-                      </a:pPr>
-                      <a:r>
-                        <a:t>100.0% (500/500)*</a:t>
-                      </a:r>
-                    </a:p>
-                  </a:txBody>
-                  <a:tcPr/>
-                </a:tc>
-                <a:tc>
-                  <a:txBody>
-                    <a:bodyPr/>
-                    <a:lstStyle/>
-                    <a:p>
-                      <a:pPr>
-                        <a:defRPr sz="1300">
-                          <a:solidFill>
-                            <a:srgbClr val="202020"/>
-                          </a:solidFill>
-                          <a:latin typeface="Calibri"/>
-                        </a:defRPr>
-                      </a:pPr>
-                      <a:r>
-                        <a:t>+9.8pp</a:t>
+                        <a:t>89.2%</a:t>
+                      </a:r>
+                    </a:p>
+                  </a:txBody>
+                  <a:tcPr/>
+                </a:tc>
+                <a:tc>
+                  <a:txBody>
+                    <a:bodyPr/>
+                    <a:lstStyle/>
+                    <a:p>
+                      <a:pPr>
+                        <a:defRPr sz="1300">
+                          <a:solidFill>
+                            <a:srgbClr val="202020"/>
+                          </a:solidFill>
+                          <a:latin typeface="Calibri"/>
+                        </a:defRPr>
+                      </a:pPr>
+                      <a:r>
+                        <a:t>99.9%</a:t>
+                      </a:r>
+                    </a:p>
+                  </a:txBody>
+                  <a:tcPr/>
+                </a:tc>
+                <a:tc>
+                  <a:txBody>
+                    <a:bodyPr/>
+                    <a:lstStyle/>
+                    <a:p>
+                      <a:pPr>
+                        <a:defRPr sz="1300">
+                          <a:solidFill>
+                            <a:srgbClr val="202020"/>
+                          </a:solidFill>
+                          <a:latin typeface="Calibri"/>
+                        </a:defRPr>
+                      </a:pPr>
+                      <a:r>
+                        <a:t>99.9%</a:t>
                       </a:r>
                     </a:p>
                   </a:txBody>
@@ -7154,27 +7154,27 @@
                         </a:defRPr>
                       </a:pPr>
                       <a:r>
-                        <a:t>70.6%</a:t>
-                      </a:r>
-                    </a:p>
-                  </a:txBody>
-                  <a:tcPr/>
-                </a:tc>
-                <a:tc>
-                  <a:txBody>
-                    <a:bodyPr/>
-                    <a:lstStyle/>
-                    <a:p>
-                      <a:pPr>
-                        <a:defRPr sz="1300">
-                          <a:solidFill>
-                            <a:srgbClr val="202020"/>
-                          </a:solidFill>
-                          <a:latin typeface="Calibri"/>
-                        </a:defRPr>
-                      </a:pPr>
-                      <a:r>
-                        <a:t>+32.7pp</a:t>
+                        <a:t>68.7%</a:t>
+                      </a:r>
+                    </a:p>
+                  </a:txBody>
+                  <a:tcPr/>
+                </a:tc>
+                <a:tc>
+                  <a:txBody>
+                    <a:bodyPr/>
+                    <a:lstStyle/>
+                    <a:p>
+                      <a:pPr>
+                        <a:defRPr sz="1300">
+                          <a:solidFill>
+                            <a:srgbClr val="202020"/>
+                          </a:solidFill>
+                          <a:latin typeface="Calibri"/>
+                        </a:defRPr>
+                      </a:pPr>
+                      <a:r>
+                        <a:t>92.0% ★★</a:t>
                       </a:r>
                     </a:p>
                   </a:txBody>
@@ -7236,27 +7236,27 @@
                         </a:defRPr>
                       </a:pPr>
                       <a:r>
-                        <a:t>83.8%</a:t>
-                      </a:r>
-                    </a:p>
-                  </a:txBody>
-                  <a:tcPr/>
-                </a:tc>
-                <a:tc>
-                  <a:txBody>
-                    <a:bodyPr/>
-                    <a:lstStyle/>
-                    <a:p>
-                      <a:pPr>
-                        <a:defRPr sz="1300">
-                          <a:solidFill>
-                            <a:srgbClr val="202020"/>
-                          </a:solidFill>
-                          <a:latin typeface="Calibri"/>
-                        </a:defRPr>
-                      </a:pPr>
-                      <a:r>
-                        <a:t>+30.0pp</a:t>
+                        <a:t>82.4%</a:t>
+                      </a:r>
+                    </a:p>
+                  </a:txBody>
+                  <a:tcPr/>
+                </a:tc>
+                <a:tc>
+                  <a:txBody>
+                    <a:bodyPr/>
+                    <a:lstStyle/>
+                    <a:p>
+                      <a:pPr>
+                        <a:defRPr sz="1300">
+                          <a:solidFill>
+                            <a:srgbClr val="202020"/>
+                          </a:solidFill>
+                          <a:latin typeface="Calibri"/>
+                        </a:defRPr>
+                      </a:pPr>
+                      <a:r>
+                        <a:t>96.5%</a:t>
                       </a:r>
                     </a:p>
                   </a:txBody>
@@ -7278,67 +7278,67 @@
                         </a:defRPr>
                       </a:pPr>
                       <a:r>
-                        <a:t>Avg confidence</a:t>
-                      </a:r>
-                    </a:p>
-                  </a:txBody>
-                  <a:tcPr/>
-                </a:tc>
-                <a:tc>
-                  <a:txBody>
-                    <a:bodyPr/>
-                    <a:lstStyle/>
-                    <a:p>
-                      <a:pPr>
-                        <a:defRPr sz="1300">
-                          <a:solidFill>
-                            <a:srgbClr val="202020"/>
-                          </a:solidFill>
-                          <a:latin typeface="Calibri"/>
-                        </a:defRPr>
-                      </a:pPr>
-                      <a:r>
-                        <a:t>0.835</a:t>
-                      </a:r>
-                    </a:p>
-                  </a:txBody>
-                  <a:tcPr/>
-                </a:tc>
-                <a:tc>
-                  <a:txBody>
-                    <a:bodyPr/>
-                    <a:lstStyle/>
-                    <a:p>
-                      <a:pPr>
-                        <a:defRPr sz="1300">
-                          <a:solidFill>
-                            <a:srgbClr val="202020"/>
-                          </a:solidFill>
-                          <a:latin typeface="Calibri"/>
-                        </a:defRPr>
-                      </a:pPr>
-                      <a:r>
-                        <a:t>0.921</a:t>
-                      </a:r>
-                    </a:p>
-                  </a:txBody>
-                  <a:tcPr/>
-                </a:tc>
-                <a:tc>
-                  <a:txBody>
-                    <a:bodyPr/>
-                    <a:lstStyle/>
-                    <a:p>
-                      <a:pPr>
-                        <a:defRPr sz="1300">
-                          <a:solidFill>
-                            <a:srgbClr val="202020"/>
-                          </a:solidFill>
-                          <a:latin typeface="Calibri"/>
-                        </a:defRPr>
-                      </a:pPr>
-                      <a:r>
-                        <a:t>+0.086</a:t>
+                        <a:t>Test size</a:t>
+                      </a:r>
+                    </a:p>
+                  </a:txBody>
+                  <a:tcPr/>
+                </a:tc>
+                <a:tc>
+                  <a:txBody>
+                    <a:bodyPr/>
+                    <a:lstStyle/>
+                    <a:p>
+                      <a:pPr>
+                        <a:defRPr sz="1300">
+                          <a:solidFill>
+                            <a:srgbClr val="202020"/>
+                          </a:solidFill>
+                          <a:latin typeface="Calibri"/>
+                        </a:defRPr>
+                      </a:pPr>
+                      <a:r>
+                        <a:t>3,731</a:t>
+                      </a:r>
+                    </a:p>
+                  </a:txBody>
+                  <a:tcPr/>
+                </a:tc>
+                <a:tc>
+                  <a:txBody>
+                    <a:bodyPr/>
+                    <a:lstStyle/>
+                    <a:p>
+                      <a:pPr>
+                        <a:defRPr sz="1300">
+                          <a:solidFill>
+                            <a:srgbClr val="202020"/>
+                          </a:solidFill>
+                          <a:latin typeface="Calibri"/>
+                        </a:defRPr>
+                      </a:pPr>
+                      <a:r>
+                        <a:t>3,731</a:t>
+                      </a:r>
+                    </a:p>
+                  </a:txBody>
+                  <a:tcPr/>
+                </a:tc>
+                <a:tc>
+                  <a:txBody>
+                    <a:bodyPr/>
+                    <a:lstStyle/>
+                    <a:p>
+                      <a:pPr>
+                        <a:defRPr sz="1300">
+                          <a:solidFill>
+                            <a:srgbClr val="202020"/>
+                          </a:solidFill>
+                          <a:latin typeface="Calibri"/>
+                        </a:defRPr>
+                      </a:pPr>
+                      <a:r>
+                        <a:t>500*</a:t>
                       </a:r>
                     </a:p>
                   </a:txBody>
@@ -7360,67 +7360,67 @@
                         </a:defRPr>
                       </a:pPr>
                       <a:r>
-                        <a:t>Tốc độ (GPU)</a:t>
-                      </a:r>
-                    </a:p>
-                  </a:txBody>
-                  <a:tcPr/>
-                </a:tc>
-                <a:tc>
-                  <a:txBody>
-                    <a:bodyPr/>
-                    <a:lstStyle/>
-                    <a:p>
-                      <a:pPr>
-                        <a:defRPr sz="1300">
-                          <a:solidFill>
-                            <a:srgbClr val="202020"/>
-                          </a:solidFill>
-                          <a:latin typeface="Calibri"/>
-                        </a:defRPr>
-                      </a:pPr>
-                      <a:r>
-                        <a:t>14.7 img/s</a:t>
-                      </a:r>
-                    </a:p>
-                  </a:txBody>
-                  <a:tcPr/>
-                </a:tc>
-                <a:tc>
-                  <a:txBody>
-                    <a:bodyPr/>
-                    <a:lstStyle/>
-                    <a:p>
-                      <a:pPr>
-                        <a:defRPr sz="1300">
-                          <a:solidFill>
-                            <a:srgbClr val="202020"/>
-                          </a:solidFill>
-                          <a:latin typeface="Calibri"/>
-                        </a:defRPr>
-                      </a:pPr>
-                      <a:r>
-                        <a:t>14.7 img/s</a:t>
-                      </a:r>
-                    </a:p>
-                  </a:txBody>
-                  <a:tcPr/>
-                </a:tc>
-                <a:tc>
-                  <a:txBody>
-                    <a:bodyPr/>
-                    <a:lstStyle/>
-                    <a:p>
-                      <a:pPr>
-                        <a:defRPr sz="1300">
-                          <a:solidFill>
-                            <a:srgbClr val="202020"/>
-                          </a:solidFill>
-                          <a:latin typeface="Calibri"/>
-                        </a:defRPr>
-                      </a:pPr>
-                      <a:r>
-                        <a:t>—</a:t>
+                        <a:t>Throughput</a:t>
+                      </a:r>
+                    </a:p>
+                  </a:txBody>
+                  <a:tcPr/>
+                </a:tc>
+                <a:tc>
+                  <a:txBody>
+                    <a:bodyPr/>
+                    <a:lstStyle/>
+                    <a:p>
+                      <a:pPr>
+                        <a:defRPr sz="1300">
+                          <a:solidFill>
+                            <a:srgbClr val="202020"/>
+                          </a:solidFill>
+                          <a:latin typeface="Calibri"/>
+                        </a:defRPr>
+                      </a:pPr>
+                      <a:r>
+                        <a:t>14.7 img/s GPU</a:t>
+                      </a:r>
+                    </a:p>
+                  </a:txBody>
+                  <a:tcPr/>
+                </a:tc>
+                <a:tc>
+                  <a:txBody>
+                    <a:bodyPr/>
+                    <a:lstStyle/>
+                    <a:p>
+                      <a:pPr>
+                        <a:defRPr sz="1300">
+                          <a:solidFill>
+                            <a:srgbClr val="202020"/>
+                          </a:solidFill>
+                          <a:latin typeface="Calibri"/>
+                        </a:defRPr>
+                      </a:pPr>
+                      <a:r>
+                        <a:t>17.9 img/s GPU</a:t>
+                      </a:r>
+                    </a:p>
+                  </a:txBody>
+                  <a:tcPr/>
+                </a:tc>
+                <a:tc>
+                  <a:txBody>
+                    <a:bodyPr/>
+                    <a:lstStyle/>
+                    <a:p>
+                      <a:pPr>
+                        <a:defRPr sz="1300">
+                          <a:solidFill>
+                            <a:srgbClr val="202020"/>
+                          </a:solidFill>
+                          <a:latin typeface="Calibri"/>
+                        </a:defRPr>
+                      </a:pPr>
+                      <a:r>
+                        <a:t>1.13 img/s CPU</a:t>
                       </a:r>
                     </a:p>
                   </a:txBody>
@@ -7462,7 +7462,7 @@
               </a:defRPr>
             </a:pPr>
             <a:r>
-              <a:t>* 500 ảnh eval; full 3,731-ảnh đang chạy. Kết quả dự kiến tương đương.</a:t>
+              <a:t>* PaddleOCR eval trên 500 ảnh; full 3,731 đang chạy (kỳ vọng ~90%)</a:t>
             </a:r>
           </a:p>
         </p:txBody>
@@ -7498,7 +7498,7 @@
               </a:defRPr>
             </a:pPr>
             <a:r>
-              <a:t>→ Fine-tune LP_detector là cải thiện quan trọng nhất: +32.7pp exact match</a:t>
+              <a:t>→ Cải thiện +54.2pp: Baseline 37.8% → Finetuned+PaddleOCR 92.0%</a:t>
             </a:r>
           </a:p>
         </p:txBody>
@@ -8171,7 +8171,7 @@
                 <a:gridCol w="3017520"/>
                 <a:gridCol w="2286000"/>
               </a:tblGrid>
-              <a:tr h="640080">
+              <a:tr h="512064">
                 <a:tc>
                   <a:txBody>
                     <a:bodyPr/>
@@ -8221,22 +8221,22 @@
                   </a:tcPr>
                 </a:tc>
               </a:tr>
-              <a:tr h="640080">
-                <a:tc>
-                  <a:txBody>
-                    <a:bodyPr/>
-                    <a:lstStyle/>
-                    <a:p>
-                      <a:pPr>
-                        <a:defRPr sz="1300">
-                          <a:solidFill>
-                            <a:srgbClr val="202020"/>
-                          </a:solidFill>
-                          <a:latin typeface="Calibri"/>
-                        </a:defRPr>
-                      </a:pPr>
-                      <a:r>
-                        <a:t>Baseline LP_detector</a:t>
+              <a:tr h="512064">
+                <a:tc>
+                  <a:txBody>
+                    <a:bodyPr/>
+                    <a:lstStyle/>
+                    <a:p>
+                      <a:pPr>
+                        <a:defRPr sz="1300">
+                          <a:solidFill>
+                            <a:srgbClr val="202020"/>
+                          </a:solidFill>
+                          <a:latin typeface="Calibri"/>
+                        </a:defRPr>
+                      </a:pPr>
+                      <a:r>
+                        <a:t>Baseline LP_detector + YOLO</a:t>
                       </a:r>
                     </a:p>
                   </a:txBody>
@@ -8263,7 +8263,7 @@
                   <a:tcPr/>
                 </a:tc>
               </a:tr>
-              <a:tr h="640080">
+              <a:tr h="512064">
                 <a:tc>
                   <a:txBody>
                     <a:bodyPr/>
@@ -8305,42 +8305,84 @@
                   <a:tcPr/>
                 </a:tc>
               </a:tr>
-              <a:tr h="640080">
-                <a:tc>
-                  <a:txBody>
-                    <a:bodyPr/>
-                    <a:lstStyle/>
-                    <a:p>
-                      <a:pPr>
-                        <a:defRPr sz="1300">
-                          <a:solidFill>
-                            <a:srgbClr val="202020"/>
-                          </a:solidFill>
-                          <a:latin typeface="Calibri"/>
-                        </a:defRPr>
-                      </a:pPr>
-                      <a:r>
-                        <a:t>Fine-tuned YOLOv8n</a:t>
-                      </a:r>
-                    </a:p>
-                  </a:txBody>
-                  <a:tcPr/>
-                </a:tc>
-                <a:tc>
-                  <a:txBody>
-                    <a:bodyPr/>
-                    <a:lstStyle/>
-                    <a:p>
-                      <a:pPr>
-                        <a:defRPr sz="1300">
-                          <a:solidFill>
-                            <a:srgbClr val="202020"/>
-                          </a:solidFill>
-                          <a:latin typeface="Calibri"/>
-                        </a:defRPr>
-                      </a:pPr>
-                      <a:r>
-                        <a:t>70.6% ★</a:t>
+              <a:tr h="512064">
+                <a:tc>
+                  <a:txBody>
+                    <a:bodyPr/>
+                    <a:lstStyle/>
+                    <a:p>
+                      <a:pPr>
+                        <a:defRPr sz="1300">
+                          <a:solidFill>
+                            <a:srgbClr val="202020"/>
+                          </a:solidFill>
+                          <a:latin typeface="Calibri"/>
+                        </a:defRPr>
+                      </a:pPr>
+                      <a:r>
+                        <a:t>Finetuned YOLOv8n + YOLO char</a:t>
+                      </a:r>
+                    </a:p>
+                  </a:txBody>
+                  <a:tcPr/>
+                </a:tc>
+                <a:tc>
+                  <a:txBody>
+                    <a:bodyPr/>
+                    <a:lstStyle/>
+                    <a:p>
+                      <a:pPr>
+                        <a:defRPr sz="1300">
+                          <a:solidFill>
+                            <a:srgbClr val="202020"/>
+                          </a:solidFill>
+                          <a:latin typeface="Calibri"/>
+                        </a:defRPr>
+                      </a:pPr>
+                      <a:r>
+                        <a:t>68.7%</a:t>
+                      </a:r>
+                    </a:p>
+                  </a:txBody>
+                  <a:tcPr/>
+                </a:tc>
+              </a:tr>
+              <a:tr h="512064">
+                <a:tc>
+                  <a:txBody>
+                    <a:bodyPr/>
+                    <a:lstStyle/>
+                    <a:p>
+                      <a:pPr>
+                        <a:defRPr sz="1300">
+                          <a:solidFill>
+                            <a:srgbClr val="202020"/>
+                          </a:solidFill>
+                          <a:latin typeface="Calibri"/>
+                        </a:defRPr>
+                      </a:pPr>
+                      <a:r>
+                        <a:t>Finetuned + PaddleOCR ★</a:t>
+                      </a:r>
+                    </a:p>
+                  </a:txBody>
+                  <a:tcPr/>
+                </a:tc>
+                <a:tc>
+                  <a:txBody>
+                    <a:bodyPr/>
+                    <a:lstStyle/>
+                    <a:p>
+                      <a:pPr>
+                        <a:defRPr sz="1300">
+                          <a:solidFill>
+                            <a:srgbClr val="202020"/>
+                          </a:solidFill>
+                          <a:latin typeface="Calibri"/>
+                        </a:defRPr>
+                      </a:pPr>
+                      <a:r>
+                        <a:t>92.0%</a:t>
                       </a:r>
                     </a:p>
                   </a:txBody>
@@ -8382,7 +8424,7 @@
               </a:defRPr>
             </a:pPr>
             <a:r>
-              <a:t>Fine-tuned VƯỢT ceiling ground truth!</a:t>
+              <a:t>Finetuned + PaddleOCR vượt xa ceiling GT!</a:t>
             </a:r>
           </a:p>
         </p:txBody>
@@ -10156,27 +10198,27 @@
                         </a:defRPr>
                       </a:pPr>
                       <a:r>
-                        <a:t>OCR exact match (finetuned)</a:t>
-                      </a:r>
-                    </a:p>
-                  </a:txBody>
-                  <a:tcPr/>
-                </a:tc>
-                <a:tc>
-                  <a:txBody>
-                    <a:bodyPr/>
-                    <a:lstStyle/>
-                    <a:p>
-                      <a:pPr>
-                        <a:defRPr sz="1300">
-                          <a:solidFill>
-                            <a:srgbClr val="202020"/>
-                          </a:solidFill>
-                          <a:latin typeface="Calibri"/>
-                        </a:defRPr>
-                      </a:pPr>
-                      <a:r>
-                        <a:t>70.6% (500 ảnh)</a:t>
+                        <a:t>OCR exact match (best)</a:t>
+                      </a:r>
+                    </a:p>
+                  </a:txBody>
+                  <a:tcPr/>
+                </a:tc>
+                <a:tc>
+                  <a:txBody>
+                    <a:bodyPr/>
+                    <a:lstStyle/>
+                    <a:p>
+                      <a:pPr>
+                        <a:defRPr sz="1300">
+                          <a:solidFill>
+                            <a:srgbClr val="202020"/>
+                          </a:solidFill>
+                          <a:latin typeface="Calibri"/>
+                        </a:defRPr>
+                      </a:pPr>
+                      <a:r>
+                        <a:t>92.0% PaddleOCR</a:t>
                       </a:r>
                     </a:p>
                   </a:txBody>
@@ -10198,27 +10240,27 @@
                         </a:defRPr>
                       </a:pPr>
                       <a:r>
-                        <a:t>OCR char accuracy (finetuned)</a:t>
-                      </a:r>
-                    </a:p>
-                  </a:txBody>
-                  <a:tcPr/>
-                </a:tc>
-                <a:tc>
-                  <a:txBody>
-                    <a:bodyPr/>
-                    <a:lstStyle/>
-                    <a:p>
-                      <a:pPr>
-                        <a:defRPr sz="1300">
-                          <a:solidFill>
-                            <a:srgbClr val="202020"/>
-                          </a:solidFill>
-                          <a:latin typeface="Calibri"/>
-                        </a:defRPr>
-                      </a:pPr>
-                      <a:r>
-                        <a:t>83.8% (500 ảnh)</a:t>
+                        <a:t>OCR char accuracy (best)</a:t>
+                      </a:r>
+                    </a:p>
+                  </a:txBody>
+                  <a:tcPr/>
+                </a:tc>
+                <a:tc>
+                  <a:txBody>
+                    <a:bodyPr/>
+                    <a:lstStyle/>
+                    <a:p>
+                      <a:pPr>
+                        <a:defRPr sz="1300">
+                          <a:solidFill>
+                            <a:srgbClr val="202020"/>
+                          </a:solidFill>
+                          <a:latin typeface="Calibri"/>
+                        </a:defRPr>
+                      </a:pPr>
+                      <a:r>
+                        <a:t>96.5%</a:t>
                       </a:r>
                     </a:p>
                   </a:txBody>
@@ -10532,7 +10574,7 @@
               </a:defRPr>
             </a:pPr>
             <a:r>
-              <a:t>✅  Fine-tune LP_detector trên VNLP 29,837 ảnh → 70.6% exact match (+32.7pp)</a:t>
+              <a:t>✅  Fine-tune LP_detector + PaddleOCR → 92.0% exact match (+54.2pp baseline)</a:t>
             </a:r>
           </a:p>
           <a:p>

--- a/slides/bao-ve-do-an.pptx
+++ b/slides/bao-ve-do-an.pptx
@@ -7006,7 +7006,7 @@
                         </a:defRPr>
                       </a:pPr>
                       <a:r>
-                        <a:t>+ PaddleOCR</a:t>
+                        <a:t>+ PaddleOCR ★</a:t>
                       </a:r>
                     </a:p>
                   </a:txBody>
@@ -7174,7 +7174,7 @@
                         </a:defRPr>
                       </a:pPr>
                       <a:r>
-                        <a:t>92.0% ★★</a:t>
+                        <a:t>91.7%</a:t>
                       </a:r>
                     </a:p>
                   </a:txBody>
@@ -7256,7 +7256,7 @@
                         </a:defRPr>
                       </a:pPr>
                       <a:r>
-                        <a:t>96.5%</a:t>
+                        <a:t>97.2%</a:t>
                       </a:r>
                     </a:p>
                   </a:txBody>
@@ -7338,7 +7338,7 @@
                         </a:defRPr>
                       </a:pPr>
                       <a:r>
-                        <a:t>500*</a:t>
+                        <a:t>3,731</a:t>
                       </a:r>
                     </a:p>
                   </a:txBody>
@@ -7380,47 +7380,47 @@
                         </a:defRPr>
                       </a:pPr>
                       <a:r>
-                        <a:t>14.7 img/s GPU</a:t>
-                      </a:r>
-                    </a:p>
-                  </a:txBody>
-                  <a:tcPr/>
-                </a:tc>
-                <a:tc>
-                  <a:txBody>
-                    <a:bodyPr/>
-                    <a:lstStyle/>
-                    <a:p>
-                      <a:pPr>
-                        <a:defRPr sz="1300">
-                          <a:solidFill>
-                            <a:srgbClr val="202020"/>
-                          </a:solidFill>
-                          <a:latin typeface="Calibri"/>
-                        </a:defRPr>
-                      </a:pPr>
-                      <a:r>
-                        <a:t>17.9 img/s GPU</a:t>
-                      </a:r>
-                    </a:p>
-                  </a:txBody>
-                  <a:tcPr/>
-                </a:tc>
-                <a:tc>
-                  <a:txBody>
-                    <a:bodyPr/>
-                    <a:lstStyle/>
-                    <a:p>
-                      <a:pPr>
-                        <a:defRPr sz="1300">
-                          <a:solidFill>
-                            <a:srgbClr val="202020"/>
-                          </a:solidFill>
-                          <a:latin typeface="Calibri"/>
-                        </a:defRPr>
-                      </a:pPr>
-                      <a:r>
-                        <a:t>1.13 img/s CPU</a:t>
+                        <a:t>14.7 GPU</a:t>
+                      </a:r>
+                    </a:p>
+                  </a:txBody>
+                  <a:tcPr/>
+                </a:tc>
+                <a:tc>
+                  <a:txBody>
+                    <a:bodyPr/>
+                    <a:lstStyle/>
+                    <a:p>
+                      <a:pPr>
+                        <a:defRPr sz="1300">
+                          <a:solidFill>
+                            <a:srgbClr val="202020"/>
+                          </a:solidFill>
+                          <a:latin typeface="Calibri"/>
+                        </a:defRPr>
+                      </a:pPr>
+                      <a:r>
+                        <a:t>17.9 GPU</a:t>
+                      </a:r>
+                    </a:p>
+                  </a:txBody>
+                  <a:tcPr/>
+                </a:tc>
+                <a:tc>
+                  <a:txBody>
+                    <a:bodyPr/>
+                    <a:lstStyle/>
+                    <a:p>
+                      <a:pPr>
+                        <a:defRPr sz="1300">
+                          <a:solidFill>
+                            <a:srgbClr val="202020"/>
+                          </a:solidFill>
+                          <a:latin typeface="Calibri"/>
+                        </a:defRPr>
+                      </a:pPr>
+                      <a:r>
+                        <a:t>0.87 CPU</a:t>
                       </a:r>
                     </a:p>
                   </a:txBody>
@@ -7462,7 +7462,7 @@
               </a:defRPr>
             </a:pPr>
             <a:r>
-              <a:t>* PaddleOCR eval trên 500 ảnh; full 3,731 đang chạy (kỳ vọng ~90%)</a:t>
+              <a:t>Evaluation trên full 3,731 ảnh test VNLP (cùng tập, công bằng)</a:t>
             </a:r>
           </a:p>
         </p:txBody>
@@ -7498,7 +7498,7 @@
               </a:defRPr>
             </a:pPr>
             <a:r>
-              <a:t>→ Cải thiện +54.2pp: Baseline 37.8% → Finetuned+PaddleOCR 92.0%</a:t>
+              <a:t>→ Cải thiện +53.9pp: Baseline 37.8% → Finetuned+PaddleOCR 91.7%</a:t>
             </a:r>
           </a:p>
         </p:txBody>
@@ -8382,7 +8382,7 @@
                         </a:defRPr>
                       </a:pPr>
                       <a:r>
-                        <a:t>92.0%</a:t>
+                        <a:t>91.7%</a:t>
                       </a:r>
                     </a:p>
                   </a:txBody>
@@ -10218,7 +10218,7 @@
                         </a:defRPr>
                       </a:pPr>
                       <a:r>
-                        <a:t>92.0% PaddleOCR</a:t>
+                        <a:t>91.7% PaddleOCR (3,731)</a:t>
                       </a:r>
                     </a:p>
                   </a:txBody>
@@ -10260,7 +10260,7 @@
                         </a:defRPr>
                       </a:pPr>
                       <a:r>
-                        <a:t>96.5%</a:t>
+                        <a:t>97.2%</a:t>
                       </a:r>
                     </a:p>
                   </a:txBody>
@@ -10574,7 +10574,7 @@
               </a:defRPr>
             </a:pPr>
             <a:r>
-              <a:t>✅  Fine-tune LP_detector + PaddleOCR → 92.0% exact match (+54.2pp baseline)</a:t>
+              <a:t>✅  Fine-tune LP_detector + PaddleOCR → 91.7% exact (+53.9pp baseline, 3,731 ảnh)</a:t>
             </a:r>
           </a:p>
           <a:p>
